--- a/pbs_site_launch.pptx
+++ b/pbs_site_launch.pptx
@@ -3086,7 +3086,7 @@
     <p:bg>
       <p:bgPr>
         <a:solidFill>
-          <a:srgbClr val="0F3765"/>
+          <a:srgbClr val="FFFFFF"/>
         </a:solidFill>
         <a:effectLst/>
       </p:bgPr>
@@ -3107,7 +3107,50 @@
         <p:spPr>
           <a:xfrm>
             <a:off x="0" y="0"/>
-            <a:ext cx="12188952" cy="109728"/>
+            <a:ext cx="7132320" cy="6858000"/>
+          </a:xfrm>
+          <a:prstGeom prst="rect">
+            <a:avLst/>
+          </a:prstGeom>
+          <a:solidFill>
+            <a:srgbClr val="164F90"/>
+          </a:solidFill>
+          <a:ln>
+            <a:noFill/>
+          </a:ln>
+        </p:spPr>
+        <p:style>
+          <a:lnRef idx="1">
+            <a:schemeClr val="accent1"/>
+          </a:lnRef>
+          <a:fillRef idx="3">
+            <a:schemeClr val="accent1"/>
+          </a:fillRef>
+          <a:effectRef idx="2">
+            <a:schemeClr val="accent1"/>
+          </a:effectRef>
+          <a:fontRef idx="minor">
+            <a:schemeClr val="lt1"/>
+          </a:fontRef>
+        </p:style>
+        <p:txBody>
+          <a:bodyPr rtlCol="0" anchor="ctr"/>
+          <a:lstStyle/>
+          <a:p>
+            <a:pPr algn="ctr"/>
+          </a:p>
+        </p:txBody>
+      </p:sp>
+      <p:sp>
+        <p:nvSpPr>
+          <p:cNvPr id="3" name="Rectangle 2"/>
+          <p:cNvSpPr/>
+          <p:nvPr/>
+        </p:nvSpPr>
+        <p:spPr>
+          <a:xfrm>
+            <a:off x="0" y="6492240"/>
+            <a:ext cx="7132320" cy="365760"/>
           </a:xfrm>
           <a:prstGeom prst="rect">
             <a:avLst/>
@@ -3143,20 +3186,20 @@
       </p:sp>
       <p:sp>
         <p:nvSpPr>
-          <p:cNvPr id="3" name="Rectangle 2"/>
+          <p:cNvPr id="4" name="Rectangle 3"/>
           <p:cNvSpPr/>
           <p:nvPr/>
         </p:nvSpPr>
         <p:spPr>
           <a:xfrm>
-            <a:off x="7772400" y="0"/>
-            <a:ext cx="4416552" cy="6858000"/>
+            <a:off x="7132320" y="0"/>
+            <a:ext cx="5056632" cy="6858000"/>
           </a:xfrm>
           <a:prstGeom prst="rect">
             <a:avLst/>
           </a:prstGeom>
           <a:solidFill>
-            <a:srgbClr val="164F90"/>
+            <a:srgbClr val="E8EFF8"/>
           </a:solidFill>
           <a:ln>
             <a:noFill/>
@@ -3186,263 +3229,14 @@
       </p:sp>
       <p:sp>
         <p:nvSpPr>
-          <p:cNvPr id="4" name="Oval 3"/>
+          <p:cNvPr id="5" name="Rectangle 4"/>
           <p:cNvSpPr/>
           <p:nvPr/>
         </p:nvSpPr>
         <p:spPr>
           <a:xfrm>
-            <a:off x="8412480" y="1097280"/>
-            <a:ext cx="3108960" cy="3108960"/>
-          </a:xfrm>
-          <a:prstGeom prst="ellipse">
-            <a:avLst/>
-          </a:prstGeom>
-          <a:solidFill>
-            <a:srgbClr val="0F3765"/>
-          </a:solidFill>
-          <a:ln w="38100">
-            <a:solidFill>
-              <a:srgbClr val="FFC72C"/>
-            </a:solidFill>
-          </a:ln>
-        </p:spPr>
-        <p:style>
-          <a:lnRef idx="1">
-            <a:schemeClr val="accent1"/>
-          </a:lnRef>
-          <a:fillRef idx="3">
-            <a:schemeClr val="accent1"/>
-          </a:fillRef>
-          <a:effectRef idx="2">
-            <a:schemeClr val="accent1"/>
-          </a:effectRef>
-          <a:fontRef idx="minor">
-            <a:schemeClr val="lt1"/>
-          </a:fontRef>
-        </p:style>
-        <p:txBody>
-          <a:bodyPr rtlCol="0" anchor="ctr"/>
-          <a:lstStyle/>
-          <a:p>
-            <a:pPr algn="ctr"/>
-          </a:p>
-        </p:txBody>
-      </p:sp>
-      <p:sp>
-        <p:nvSpPr>
-          <p:cNvPr id="5" name="TextBox 4"/>
-          <p:cNvSpPr txBox="1"/>
-          <p:nvPr/>
-        </p:nvSpPr>
-        <p:spPr>
-          <a:xfrm>
-            <a:off x="8412480" y="1737360"/>
-            <a:ext cx="3108960" cy="1097280"/>
-          </a:xfrm>
-          <a:prstGeom prst="rect">
-            <a:avLst/>
-          </a:prstGeom>
-          <a:noFill/>
-        </p:spPr>
-        <p:txBody>
-          <a:bodyPr wrap="square">
-            <a:spAutoFit/>
-          </a:bodyPr>
-          <a:lstStyle/>
-          <a:p>
-            <a:pPr algn="ctr"/>
-            <a:r>
-              <a:rPr sz="6400" b="1" i="0">
-                <a:solidFill>
-                  <a:srgbClr val="FFC72C"/>
-                </a:solidFill>
-              </a:rPr>
-              <a:t>ΦΒΣ</a:t>
-            </a:r>
-          </a:p>
-        </p:txBody>
-      </p:sp>
-      <p:sp>
-        <p:nvSpPr>
-          <p:cNvPr id="6" name="TextBox 5"/>
-          <p:cNvSpPr txBox="1"/>
-          <p:nvPr/>
-        </p:nvSpPr>
-        <p:spPr>
-          <a:xfrm>
-            <a:off x="8412480" y="2834640"/>
-            <a:ext cx="3108960" cy="548640"/>
-          </a:xfrm>
-          <a:prstGeom prst="rect">
-            <a:avLst/>
-          </a:prstGeom>
-          <a:noFill/>
-        </p:spPr>
-        <p:txBody>
-          <a:bodyPr wrap="square">
-            <a:spAutoFit/>
-          </a:bodyPr>
-          <a:lstStyle/>
-          <a:p>
-            <a:pPr algn="ctr"/>
-            <a:r>
-              <a:rPr sz="1800" b="0" i="0">
-                <a:solidFill>
-                  <a:srgbClr val="FFFFFF"/>
-                </a:solidFill>
-              </a:rPr>
-              <a:t>1914</a:t>
-            </a:r>
-          </a:p>
-        </p:txBody>
-      </p:sp>
-      <p:sp>
-        <p:nvSpPr>
-          <p:cNvPr id="7" name="TextBox 6"/>
-          <p:cNvSpPr txBox="1"/>
-          <p:nvPr/>
-        </p:nvSpPr>
-        <p:spPr>
-          <a:xfrm>
-            <a:off x="548640" y="1280160"/>
-            <a:ext cx="6858000" cy="457200"/>
-          </a:xfrm>
-          <a:prstGeom prst="rect">
-            <a:avLst/>
-          </a:prstGeom>
-          <a:noFill/>
-        </p:spPr>
-        <p:txBody>
-          <a:bodyPr wrap="square">
-            <a:spAutoFit/>
-          </a:bodyPr>
-          <a:lstStyle/>
-          <a:p>
-            <a:pPr algn="l"/>
-            <a:r>
-              <a:rPr sz="1300" b="1" i="0">
-                <a:solidFill>
-                  <a:srgbClr val="FFC72C"/>
-                </a:solidFill>
-              </a:rPr>
-              <a:t>INTRODUCING</a:t>
-            </a:r>
-          </a:p>
-        </p:txBody>
-      </p:sp>
-      <p:sp>
-        <p:nvSpPr>
-          <p:cNvPr id="8" name="TextBox 7"/>
-          <p:cNvSpPr txBox="1"/>
-          <p:nvPr/>
-        </p:nvSpPr>
-        <p:spPr>
-          <a:xfrm>
-            <a:off x="548640" y="1737360"/>
-            <a:ext cx="7132320" cy="1280160"/>
-          </a:xfrm>
-          <a:prstGeom prst="rect">
-            <a:avLst/>
-          </a:prstGeom>
-          <a:noFill/>
-        </p:spPr>
-        <p:txBody>
-          <a:bodyPr wrap="square">
-            <a:spAutoFit/>
-          </a:bodyPr>
-          <a:lstStyle/>
-          <a:p>
-            <a:pPr algn="l"/>
-            <a:r>
-              <a:rPr sz="3800" b="1" i="0">
-                <a:solidFill>
-                  <a:srgbClr val="FFFFFF"/>
-                </a:solidFill>
-              </a:rPr>
-              <a:t>Our New Chapter Website</a:t>
-            </a:r>
-          </a:p>
-        </p:txBody>
-      </p:sp>
-      <p:sp>
-        <p:nvSpPr>
-          <p:cNvPr id="9" name="TextBox 8"/>
-          <p:cNvSpPr txBox="1"/>
-          <p:nvPr/>
-        </p:nvSpPr>
-        <p:spPr>
-          <a:xfrm>
-            <a:off x="548640" y="3063240"/>
-            <a:ext cx="6858000" cy="502920"/>
-          </a:xfrm>
-          <a:prstGeom prst="rect">
-            <a:avLst/>
-          </a:prstGeom>
-          <a:noFill/>
-        </p:spPr>
-        <p:txBody>
-          <a:bodyPr wrap="square">
-            <a:spAutoFit/>
-          </a:bodyPr>
-          <a:lstStyle/>
-          <a:p>
-            <a:pPr algn="l"/>
-            <a:r>
-              <a:rPr sz="1800" b="1" i="0">
-                <a:solidFill>
-                  <a:srgbClr val="FFC72C"/>
-                </a:solidFill>
-              </a:rPr>
-              <a:t>newsite.psibetasigma1914.org</a:t>
-            </a:r>
-          </a:p>
-        </p:txBody>
-      </p:sp>
-      <p:sp>
-        <p:nvSpPr>
-          <p:cNvPr id="10" name="TextBox 9"/>
-          <p:cNvSpPr txBox="1"/>
-          <p:nvPr/>
-        </p:nvSpPr>
-        <p:spPr>
-          <a:xfrm>
-            <a:off x="548640" y="3611880"/>
-            <a:ext cx="7132320" cy="457200"/>
-          </a:xfrm>
-          <a:prstGeom prst="rect">
-            <a:avLst/>
-          </a:prstGeom>
-          <a:noFill/>
-        </p:spPr>
-        <p:txBody>
-          <a:bodyPr wrap="square">
-            <a:spAutoFit/>
-          </a:bodyPr>
-          <a:lstStyle/>
-          <a:p>
-            <a:pPr algn="l"/>
-            <a:r>
-              <a:rPr sz="1400" b="0" i="0">
-                <a:solidFill>
-                  <a:srgbClr val="FFFFFF"/>
-                </a:solidFill>
-              </a:rPr>
-              <a:t>Austin Sigmas Chapter  ·  Phi Beta Sigma Fraternity, Inc.</a:t>
-            </a:r>
-          </a:p>
-        </p:txBody>
-      </p:sp>
-      <p:sp>
-        <p:nvSpPr>
-          <p:cNvPr id="11" name="Rectangle 10"/>
-          <p:cNvSpPr/>
-          <p:nvPr/>
-        </p:nvSpPr>
-        <p:spPr>
-          <a:xfrm>
-            <a:off x="548640" y="4160520"/>
-            <a:ext cx="1097280" cy="54864"/>
+            <a:off x="0" y="0"/>
+            <a:ext cx="12188952" cy="91440"/>
           </a:xfrm>
           <a:prstGeom prst="rect">
             <a:avLst/>
@@ -3478,14 +3272,81 @@
       </p:sp>
       <p:sp>
         <p:nvSpPr>
-          <p:cNvPr id="12" name="TextBox 11"/>
+          <p:cNvPr id="6" name="Oval 5"/>
+          <p:cNvSpPr/>
+          <p:nvPr/>
+        </p:nvSpPr>
+        <p:spPr>
+          <a:xfrm>
+            <a:off x="7818120" y="822960"/>
+            <a:ext cx="3474720" cy="3474720"/>
+          </a:xfrm>
+          <a:prstGeom prst="ellipse">
+            <a:avLst/>
+          </a:prstGeom>
+          <a:solidFill>
+            <a:srgbClr val="FFFFFF"/>
+          </a:solidFill>
+          <a:ln>
+            <a:noFill/>
+          </a:ln>
+        </p:spPr>
+        <p:style>
+          <a:lnRef idx="1">
+            <a:schemeClr val="accent1"/>
+          </a:lnRef>
+          <a:fillRef idx="3">
+            <a:schemeClr val="accent1"/>
+          </a:fillRef>
+          <a:effectRef idx="2">
+            <a:schemeClr val="accent1"/>
+          </a:effectRef>
+          <a:fontRef idx="minor">
+            <a:schemeClr val="lt1"/>
+          </a:fontRef>
+        </p:style>
+        <p:txBody>
+          <a:bodyPr rtlCol="0" anchor="ctr"/>
+          <a:lstStyle/>
+          <a:p>
+            <a:pPr algn="ctr"/>
+          </a:p>
+        </p:txBody>
+      </p:sp>
+      <p:pic>
+        <p:nvPicPr>
+          <p:cNvPr id="7" name="Picture 6" descr="pbs_logo.jpeg"/>
+          <p:cNvPicPr>
+            <a:picLocks noChangeAspect="1"/>
+          </p:cNvPicPr>
+          <p:nvPr/>
+        </p:nvPicPr>
+        <p:blipFill>
+          <a:blip r:embed="rId2"/>
+          <a:stretch>
+            <a:fillRect/>
+          </a:stretch>
+        </p:blipFill>
+        <p:spPr>
+          <a:xfrm>
+            <a:off x="7955279" y="914400"/>
+            <a:ext cx="3200400" cy="3200400"/>
+          </a:xfrm>
+          <a:prstGeom prst="rect">
+            <a:avLst/>
+          </a:prstGeom>
+        </p:spPr>
+      </p:pic>
+      <p:sp>
+        <p:nvSpPr>
+          <p:cNvPr id="8" name="TextBox 7"/>
           <p:cNvSpPr txBox="1"/>
           <p:nvPr/>
         </p:nvSpPr>
         <p:spPr>
           <a:xfrm>
-            <a:off x="548640" y="4297680"/>
-            <a:ext cx="6858000" cy="457200"/>
+            <a:off x="7132320" y="4206240"/>
+            <a:ext cx="4937760" cy="457200"/>
           </a:xfrm>
           <a:prstGeom prst="rect">
             <a:avLst/>
@@ -3498,28 +3359,135 @@
           </a:bodyPr>
           <a:lstStyle/>
           <a:p>
+            <a:pPr algn="ctr"/>
+            <a:r>
+              <a:rPr sz="1300" b="1" i="0">
+                <a:solidFill>
+                  <a:srgbClr val="164F90"/>
+                </a:solidFill>
+                <a:latin typeface="Calibri"/>
+              </a:rPr>
+              <a:t>Austin Sigmas Chapter</a:t>
+            </a:r>
+          </a:p>
+        </p:txBody>
+      </p:sp>
+      <p:sp>
+        <p:nvSpPr>
+          <p:cNvPr id="9" name="TextBox 8"/>
+          <p:cNvSpPr txBox="1"/>
+          <p:nvPr/>
+        </p:nvSpPr>
+        <p:spPr>
+          <a:xfrm>
+            <a:off x="7132320" y="4663440"/>
+            <a:ext cx="4937760" cy="365760"/>
+          </a:xfrm>
+          <a:prstGeom prst="rect">
+            <a:avLst/>
+          </a:prstGeom>
+          <a:noFill/>
+        </p:spPr>
+        <p:txBody>
+          <a:bodyPr wrap="square">
+            <a:spAutoFit/>
+          </a:bodyPr>
+          <a:lstStyle/>
+          <a:p>
+            <a:pPr algn="ctr"/>
+            <a:r>
+              <a:rPr sz="1100" b="0" i="1">
+                <a:solidFill>
+                  <a:srgbClr val="0F3765"/>
+                </a:solidFill>
+                <a:latin typeface="Calibri"/>
+              </a:rPr>
+              <a:t>Phi Beta Sigma Fraternity, Inc.</a:t>
+            </a:r>
+          </a:p>
+        </p:txBody>
+      </p:sp>
+      <p:sp>
+        <p:nvSpPr>
+          <p:cNvPr id="10" name="TextBox 9"/>
+          <p:cNvSpPr txBox="1"/>
+          <p:nvPr/>
+        </p:nvSpPr>
+        <p:spPr>
+          <a:xfrm>
+            <a:off x="502920" y="1188720"/>
+            <a:ext cx="6400800" cy="365760"/>
+          </a:xfrm>
+          <a:prstGeom prst="rect">
+            <a:avLst/>
+          </a:prstGeom>
+          <a:noFill/>
+        </p:spPr>
+        <p:txBody>
+          <a:bodyPr wrap="square">
+            <a:spAutoFit/>
+          </a:bodyPr>
+          <a:lstStyle/>
+          <a:p>
             <a:pPr algn="l"/>
             <a:r>
-              <a:rPr sz="1200" b="0" i="1">
-                <a:solidFill>
-                  <a:srgbClr val="CCD9EE"/>
-                </a:solidFill>
+              <a:rPr sz="1100" b="1" i="0">
+                <a:solidFill>
+                  <a:srgbClr val="FFC72C"/>
+                </a:solidFill>
+                <a:latin typeface="Calibri"/>
               </a:rPr>
-              <a:t>Launched May 2026  ·  Built for Brothers, Families &amp; Friends</a:t>
-            </a:r>
-          </a:p>
-        </p:txBody>
-      </p:sp>
-      <p:sp>
-        <p:nvSpPr>
-          <p:cNvPr id="13" name="Rectangle 12"/>
+              <a:t>INTRODUCING</a:t>
+            </a:r>
+          </a:p>
+        </p:txBody>
+      </p:sp>
+      <p:sp>
+        <p:nvSpPr>
+          <p:cNvPr id="11" name="TextBox 10"/>
+          <p:cNvSpPr txBox="1"/>
+          <p:nvPr/>
+        </p:nvSpPr>
+        <p:spPr>
+          <a:xfrm>
+            <a:off x="502920" y="1554480"/>
+            <a:ext cx="6400800" cy="1645920"/>
+          </a:xfrm>
+          <a:prstGeom prst="rect">
+            <a:avLst/>
+          </a:prstGeom>
+          <a:noFill/>
+        </p:spPr>
+        <p:txBody>
+          <a:bodyPr wrap="square">
+            <a:spAutoFit/>
+          </a:bodyPr>
+          <a:lstStyle/>
+          <a:p>
+            <a:pPr algn="l"/>
+            <a:r>
+              <a:rPr sz="4000" b="1" i="0">
+                <a:solidFill>
+                  <a:srgbClr val="FFFFFF"/>
+                </a:solidFill>
+                <a:latin typeface="Calibri"/>
+              </a:rPr>
+              <a:t>Our New
+Chapter Website</a:t>
+            </a:r>
+          </a:p>
+        </p:txBody>
+      </p:sp>
+      <p:sp>
+        <p:nvSpPr>
+          <p:cNvPr id="12" name="Rectangle 11"/>
           <p:cNvSpPr/>
           <p:nvPr/>
         </p:nvSpPr>
         <p:spPr>
           <a:xfrm>
-            <a:off x="0" y="6720840"/>
-            <a:ext cx="12188952" cy="137160"/>
+            <a:off x="502920" y="3291840"/>
+            <a:ext cx="1280160" cy="54864"/>
           </a:xfrm>
           <a:prstGeom prst="rect">
             <a:avLst/>
@@ -3550,6 +3518,111 @@
           <a:lstStyle/>
           <a:p>
             <a:pPr algn="ctr"/>
+          </a:p>
+        </p:txBody>
+      </p:sp>
+      <p:sp>
+        <p:nvSpPr>
+          <p:cNvPr id="13" name="TextBox 12"/>
+          <p:cNvSpPr txBox="1"/>
+          <p:nvPr/>
+        </p:nvSpPr>
+        <p:spPr>
+          <a:xfrm>
+            <a:off x="502920" y="3429000"/>
+            <a:ext cx="6400800" cy="457200"/>
+          </a:xfrm>
+          <a:prstGeom prst="rect">
+            <a:avLst/>
+          </a:prstGeom>
+          <a:noFill/>
+        </p:spPr>
+        <p:txBody>
+          <a:bodyPr wrap="square">
+            <a:spAutoFit/>
+          </a:bodyPr>
+          <a:lstStyle/>
+          <a:p>
+            <a:pPr algn="l"/>
+            <a:r>
+              <a:rPr sz="1700" b="1" i="0">
+                <a:solidFill>
+                  <a:srgbClr val="FFC72C"/>
+                </a:solidFill>
+                <a:latin typeface="Calibri"/>
+              </a:rPr>
+              <a:t>newsite.psibetasigma1914.org</a:t>
+            </a:r>
+          </a:p>
+        </p:txBody>
+      </p:sp>
+      <p:sp>
+        <p:nvSpPr>
+          <p:cNvPr id="14" name="TextBox 13"/>
+          <p:cNvSpPr txBox="1"/>
+          <p:nvPr/>
+        </p:nvSpPr>
+        <p:spPr>
+          <a:xfrm>
+            <a:off x="502920" y="3931920"/>
+            <a:ext cx="6400800" cy="365760"/>
+          </a:xfrm>
+          <a:prstGeom prst="rect">
+            <a:avLst/>
+          </a:prstGeom>
+          <a:noFill/>
+        </p:spPr>
+        <p:txBody>
+          <a:bodyPr wrap="square">
+            <a:spAutoFit/>
+          </a:bodyPr>
+          <a:lstStyle/>
+          <a:p>
+            <a:pPr algn="l"/>
+            <a:r>
+              <a:rPr sz="1100" b="0" i="1">
+                <a:solidFill>
+                  <a:srgbClr val="CCDDFF"/>
+                </a:solidFill>
+                <a:latin typeface="Calibri"/>
+              </a:rPr>
+              <a:t>Launched May 2026  ·  Built for Brothers, Families &amp; Friends</a:t>
+            </a:r>
+          </a:p>
+        </p:txBody>
+      </p:sp>
+      <p:sp>
+        <p:nvSpPr>
+          <p:cNvPr id="15" name="TextBox 14"/>
+          <p:cNvSpPr txBox="1"/>
+          <p:nvPr/>
+        </p:nvSpPr>
+        <p:spPr>
+          <a:xfrm>
+            <a:off x="7132320" y="6492240"/>
+            <a:ext cx="4937760" cy="347472"/>
+          </a:xfrm>
+          <a:prstGeom prst="rect">
+            <a:avLst/>
+          </a:prstGeom>
+          <a:noFill/>
+        </p:spPr>
+        <p:txBody>
+          <a:bodyPr wrap="square">
+            <a:spAutoFit/>
+          </a:bodyPr>
+          <a:lstStyle/>
+          <a:p>
+            <a:pPr algn="ctr"/>
+            <a:r>
+              <a:rPr sz="1000" b="1" i="0">
+                <a:solidFill>
+                  <a:srgbClr val="164F90"/>
+                </a:solidFill>
+                <a:latin typeface="Calibri"/>
+              </a:rPr>
+              <a:t>psibetasigma1914.org</a:t>
+            </a:r>
           </a:p>
         </p:txBody>
       </p:sp>
@@ -3588,7 +3661,7 @@
         <p:spPr>
           <a:xfrm>
             <a:off x="0" y="0"/>
-            <a:ext cx="12188952" cy="73152"/>
+            <a:ext cx="12188952" cy="1143000"/>
           </a:xfrm>
           <a:prstGeom prst="rect">
             <a:avLst/>
@@ -3630,8 +3703,190 @@
         </p:nvSpPr>
         <p:spPr>
           <a:xfrm>
-            <a:off x="0" y="73152"/>
-            <a:ext cx="12188952" cy="1005840"/>
+            <a:off x="0" y="1143000"/>
+            <a:ext cx="12188952" cy="64008"/>
+          </a:xfrm>
+          <a:prstGeom prst="rect">
+            <a:avLst/>
+          </a:prstGeom>
+          <a:solidFill>
+            <a:srgbClr val="FFC72C"/>
+          </a:solidFill>
+          <a:ln>
+            <a:noFill/>
+          </a:ln>
+        </p:spPr>
+        <p:style>
+          <a:lnRef idx="1">
+            <a:schemeClr val="accent1"/>
+          </a:lnRef>
+          <a:fillRef idx="3">
+            <a:schemeClr val="accent1"/>
+          </a:fillRef>
+          <a:effectRef idx="2">
+            <a:schemeClr val="accent1"/>
+          </a:effectRef>
+          <a:fontRef idx="minor">
+            <a:schemeClr val="lt1"/>
+          </a:fontRef>
+        </p:style>
+        <p:txBody>
+          <a:bodyPr rtlCol="0" anchor="ctr"/>
+          <a:lstStyle/>
+          <a:p>
+            <a:pPr algn="ctr"/>
+          </a:p>
+        </p:txBody>
+      </p:sp>
+      <p:pic>
+        <p:nvPicPr>
+          <p:cNvPr id="4" name="Picture 3" descr="pbs_logo.jpeg"/>
+          <p:cNvPicPr>
+            <a:picLocks noChangeAspect="1"/>
+          </p:cNvPicPr>
+          <p:nvPr/>
+        </p:nvPicPr>
+        <p:blipFill>
+          <a:blip r:embed="rId2"/>
+          <a:stretch>
+            <a:fillRect/>
+          </a:stretch>
+        </p:blipFill>
+        <p:spPr>
+          <a:xfrm>
+            <a:off x="182880" y="45720"/>
+            <a:ext cx="1005840" cy="1005840"/>
+          </a:xfrm>
+          <a:prstGeom prst="rect">
+            <a:avLst/>
+          </a:prstGeom>
+        </p:spPr>
+      </p:pic>
+      <p:sp>
+        <p:nvSpPr>
+          <p:cNvPr id="5" name="TextBox 4"/>
+          <p:cNvSpPr txBox="1"/>
+          <p:nvPr/>
+        </p:nvSpPr>
+        <p:spPr>
+          <a:xfrm>
+            <a:off x="1325880" y="91440"/>
+            <a:ext cx="6400800" cy="320040"/>
+          </a:xfrm>
+          <a:prstGeom prst="rect">
+            <a:avLst/>
+          </a:prstGeom>
+          <a:noFill/>
+        </p:spPr>
+        <p:txBody>
+          <a:bodyPr wrap="square">
+            <a:spAutoFit/>
+          </a:bodyPr>
+          <a:lstStyle/>
+          <a:p>
+            <a:pPr algn="l"/>
+            <a:r>
+              <a:rPr sz="1000" b="1" i="0">
+                <a:solidFill>
+                  <a:srgbClr val="FFC72C"/>
+                </a:solidFill>
+                <a:latin typeface="Calibri"/>
+              </a:rPr>
+              <a:t>SITE OVERVIEW</a:t>
+            </a:r>
+          </a:p>
+        </p:txBody>
+      </p:sp>
+      <p:sp>
+        <p:nvSpPr>
+          <p:cNvPr id="6" name="TextBox 5"/>
+          <p:cNvSpPr txBox="1"/>
+          <p:nvPr/>
+        </p:nvSpPr>
+        <p:spPr>
+          <a:xfrm>
+            <a:off x="1325880" y="384048"/>
+            <a:ext cx="8686800" cy="640080"/>
+          </a:xfrm>
+          <a:prstGeom prst="rect">
+            <a:avLst/>
+          </a:prstGeom>
+          <a:noFill/>
+        </p:spPr>
+        <p:txBody>
+          <a:bodyPr wrap="square">
+            <a:spAutoFit/>
+          </a:bodyPr>
+          <a:lstStyle/>
+          <a:p>
+            <a:pPr algn="l"/>
+            <a:r>
+              <a:rPr sz="2400" b="1" i="0">
+                <a:solidFill>
+                  <a:srgbClr val="FFFFFF"/>
+                </a:solidFill>
+                <a:latin typeface="Calibri"/>
+              </a:rPr>
+              <a:t>What's Live &amp; Ready on the New Chapter Site</a:t>
+            </a:r>
+          </a:p>
+        </p:txBody>
+      </p:sp>
+      <p:sp>
+        <p:nvSpPr>
+          <p:cNvPr id="7" name="Rectangle 6"/>
+          <p:cNvSpPr/>
+          <p:nvPr/>
+        </p:nvSpPr>
+        <p:spPr>
+          <a:xfrm>
+            <a:off x="201168" y="1325880"/>
+            <a:ext cx="3822191" cy="5257800"/>
+          </a:xfrm>
+          <a:prstGeom prst="rect">
+            <a:avLst/>
+          </a:prstGeom>
+          <a:solidFill>
+            <a:srgbClr val="E8EFF8"/>
+          </a:solidFill>
+          <a:ln w="6350">
+            <a:solidFill>
+              <a:srgbClr val="BBCCEE"/>
+            </a:solidFill>
+          </a:ln>
+        </p:spPr>
+        <p:style>
+          <a:lnRef idx="1">
+            <a:schemeClr val="accent1"/>
+          </a:lnRef>
+          <a:fillRef idx="3">
+            <a:schemeClr val="accent1"/>
+          </a:fillRef>
+          <a:effectRef idx="2">
+            <a:schemeClr val="accent1"/>
+          </a:effectRef>
+          <a:fontRef idx="minor">
+            <a:schemeClr val="lt1"/>
+          </a:fontRef>
+        </p:style>
+        <p:txBody>
+          <a:bodyPr rtlCol="0" anchor="ctr"/>
+          <a:lstStyle/>
+          <a:p>
+            <a:pPr algn="ctr"/>
+          </a:p>
+        </p:txBody>
+      </p:sp>
+      <p:sp>
+        <p:nvSpPr>
+          <p:cNvPr id="8" name="Rectangle 7"/>
+          <p:cNvSpPr/>
+          <p:nvPr/>
+        </p:nvSpPr>
+        <p:spPr>
+          <a:xfrm>
+            <a:off x="201168" y="1325880"/>
+            <a:ext cx="3822191" cy="566928"/>
           </a:xfrm>
           <a:prstGeom prst="rect">
             <a:avLst/>
@@ -3667,23 +3922,243 @@
       </p:sp>
       <p:sp>
         <p:nvSpPr>
-          <p:cNvPr id="4" name="Rectangle 3"/>
+          <p:cNvPr id="9" name="TextBox 8"/>
+          <p:cNvSpPr txBox="1"/>
+          <p:nvPr/>
+        </p:nvSpPr>
+        <p:spPr>
+          <a:xfrm>
+            <a:off x="310896" y="1371600"/>
+            <a:ext cx="3639311" cy="475488"/>
+          </a:xfrm>
+          <a:prstGeom prst="rect">
+            <a:avLst/>
+          </a:prstGeom>
+          <a:noFill/>
+        </p:spPr>
+        <p:txBody>
+          <a:bodyPr wrap="square">
+            <a:spAutoFit/>
+          </a:bodyPr>
+          <a:lstStyle/>
+          <a:p>
+            <a:pPr algn="l"/>
+            <a:r>
+              <a:rPr sz="1300" b="1" i="0">
+                <a:solidFill>
+                  <a:srgbClr val="FFFFFF"/>
+                </a:solidFill>
+                <a:latin typeface="Calibri"/>
+              </a:rPr>
+              <a:t>📄  10 Core Pages</a:t>
+            </a:r>
+          </a:p>
+        </p:txBody>
+      </p:sp>
+      <p:sp>
+        <p:nvSpPr>
+          <p:cNvPr id="10" name="TextBox 9"/>
+          <p:cNvSpPr txBox="1"/>
+          <p:nvPr/>
+        </p:nvSpPr>
+        <p:spPr>
+          <a:xfrm>
+            <a:off x="365760" y="1938528"/>
+            <a:ext cx="3547872" cy="4480560"/>
+          </a:xfrm>
+          <a:prstGeom prst="rect">
+            <a:avLst/>
+          </a:prstGeom>
+          <a:noFill/>
+        </p:spPr>
+        <p:txBody>
+          <a:bodyPr wrap="square">
+            <a:spAutoFit/>
+          </a:bodyPr>
+          <a:lstStyle/>
+          <a:p>
+            <a:pPr>
+              <a:spcAft>
+                <a:spcPts val="500"/>
+              </a:spcAft>
+            </a:pPr>
+            <a:r>
+              <a:rPr sz="1050">
+                <a:solidFill>
+                  <a:srgbClr val="1A1A4A"/>
+                </a:solidFill>
+                <a:latin typeface="Calibri"/>
+              </a:rPr>
+              <a:t>●  Home — chapter intro &amp; mission</a:t>
+            </a:r>
+          </a:p>
+          <a:p>
+            <a:pPr>
+              <a:spcAft>
+                <a:spcPts val="500"/>
+              </a:spcAft>
+            </a:pPr>
+            <a:r>
+              <a:rPr sz="1050">
+                <a:solidFill>
+                  <a:srgbClr val="1A1A4A"/>
+                </a:solidFill>
+                <a:latin typeface="Calibri"/>
+              </a:rPr>
+              <a:t>●  About Us — chapter story &amp; history</a:t>
+            </a:r>
+          </a:p>
+          <a:p>
+            <a:pPr>
+              <a:spcAft>
+                <a:spcPts val="500"/>
+              </a:spcAft>
+            </a:pPr>
+            <a:r>
+              <a:rPr sz="1050">
+                <a:solidFill>
+                  <a:srgbClr val="1A1A4A"/>
+                </a:solidFill>
+                <a:latin typeface="Calibri"/>
+              </a:rPr>
+              <a:t>●  President's Corner — message &amp; contact</a:t>
+            </a:r>
+          </a:p>
+          <a:p>
+            <a:pPr>
+              <a:spcAft>
+                <a:spcPts val="500"/>
+              </a:spcAft>
+            </a:pPr>
+            <a:r>
+              <a:rPr sz="1050">
+                <a:solidFill>
+                  <a:srgbClr val="1A1A4A"/>
+                </a:solidFill>
+                <a:latin typeface="Calibri"/>
+              </a:rPr>
+              <a:t>●  Executive Board — officers with direct emails</a:t>
+            </a:r>
+          </a:p>
+          <a:p>
+            <a:pPr>
+              <a:spcAft>
+                <a:spcPts val="500"/>
+              </a:spcAft>
+            </a:pPr>
+            <a:r>
+              <a:rPr sz="1050">
+                <a:solidFill>
+                  <a:srgbClr val="1A1A4A"/>
+                </a:solidFill>
+                <a:latin typeface="Calibri"/>
+              </a:rPr>
+              <a:t>●  Programs — chapter initiatives</a:t>
+            </a:r>
+          </a:p>
+          <a:p>
+            <a:pPr>
+              <a:spcAft>
+                <a:spcPts val="500"/>
+              </a:spcAft>
+            </a:pPr>
+            <a:r>
+              <a:rPr sz="1050">
+                <a:solidFill>
+                  <a:srgbClr val="1A1A4A"/>
+                </a:solidFill>
+                <a:latin typeface="Calibri"/>
+              </a:rPr>
+              <a:t>●  Events — upcoming activities &amp; calendar</a:t>
+            </a:r>
+          </a:p>
+          <a:p>
+            <a:pPr>
+              <a:spcAft>
+                <a:spcPts val="500"/>
+              </a:spcAft>
+            </a:pPr>
+            <a:r>
+              <a:rPr sz="1050">
+                <a:solidFill>
+                  <a:srgbClr val="1A1A4A"/>
+                </a:solidFill>
+                <a:latin typeface="Calibri"/>
+              </a:rPr>
+              <a:t>●  News — announcements &amp; updates</a:t>
+            </a:r>
+          </a:p>
+          <a:p>
+            <a:pPr>
+              <a:spcAft>
+                <a:spcPts val="500"/>
+              </a:spcAft>
+            </a:pPr>
+            <a:r>
+              <a:rPr sz="1050">
+                <a:solidFill>
+                  <a:srgbClr val="1A1A4A"/>
+                </a:solidFill>
+                <a:latin typeface="Calibri"/>
+              </a:rPr>
+              <a:t>●  Members Portal — secure login area</a:t>
+            </a:r>
+          </a:p>
+          <a:p>
+            <a:pPr>
+              <a:spcAft>
+                <a:spcPts val="500"/>
+              </a:spcAft>
+            </a:pPr>
+            <a:r>
+              <a:rPr sz="1050">
+                <a:solidFill>
+                  <a:srgbClr val="1A1A4A"/>
+                </a:solidFill>
+                <a:latin typeface="Calibri"/>
+              </a:rPr>
+              <a:t>●  Join Sigma — membership information</a:t>
+            </a:r>
+          </a:p>
+          <a:p>
+            <a:pPr>
+              <a:spcAft>
+                <a:spcPts val="500"/>
+              </a:spcAft>
+            </a:pPr>
+            <a:r>
+              <a:rPr sz="1050">
+                <a:solidFill>
+                  <a:srgbClr val="1A1A4A"/>
+                </a:solidFill>
+                <a:latin typeface="Calibri"/>
+              </a:rPr>
+              <a:t>●  Contact — reach the chapter</a:t>
+            </a:r>
+          </a:p>
+        </p:txBody>
+      </p:sp>
+      <p:sp>
+        <p:nvSpPr>
+          <p:cNvPr id="11" name="Rectangle 10"/>
           <p:cNvSpPr/>
           <p:nvPr/>
         </p:nvSpPr>
         <p:spPr>
           <a:xfrm>
-            <a:off x="0" y="1078992"/>
-            <a:ext cx="12188952" cy="54864"/>
+            <a:off x="4206240" y="1325880"/>
+            <a:ext cx="3822191" cy="5257800"/>
           </a:xfrm>
           <a:prstGeom prst="rect">
             <a:avLst/>
           </a:prstGeom>
           <a:solidFill>
-            <a:srgbClr val="FFC72C"/>
+            <a:srgbClr val="E8EFF8"/>
           </a:solidFill>
-          <a:ln>
-            <a:noFill/>
+          <a:ln w="6350">
+            <a:solidFill>
+              <a:srgbClr val="BBCCEE"/>
+            </a:solidFill>
           </a:ln>
         </p:spPr>
         <p:style>
@@ -3710,127 +4185,14 @@
       </p:sp>
       <p:sp>
         <p:nvSpPr>
-          <p:cNvPr id="5" name="TextBox 4"/>
-          <p:cNvSpPr txBox="1"/>
-          <p:nvPr/>
-        </p:nvSpPr>
-        <p:spPr>
-          <a:xfrm>
-            <a:off x="365760" y="109728"/>
-            <a:ext cx="4572000" cy="365760"/>
-          </a:xfrm>
-          <a:prstGeom prst="rect">
-            <a:avLst/>
-          </a:prstGeom>
-          <a:noFill/>
-        </p:spPr>
-        <p:txBody>
-          <a:bodyPr wrap="square">
-            <a:spAutoFit/>
-          </a:bodyPr>
-          <a:lstStyle/>
-          <a:p>
-            <a:pPr algn="l"/>
-            <a:r>
-              <a:rPr sz="1100" b="1" i="0">
-                <a:solidFill>
-                  <a:srgbClr val="FFC72C"/>
-                </a:solidFill>
-              </a:rPr>
-              <a:t>SITE OVERVIEW</a:t>
-            </a:r>
-          </a:p>
-        </p:txBody>
-      </p:sp>
-      <p:sp>
-        <p:nvSpPr>
-          <p:cNvPr id="6" name="TextBox 5"/>
-          <p:cNvSpPr txBox="1"/>
-          <p:nvPr/>
-        </p:nvSpPr>
-        <p:spPr>
-          <a:xfrm>
-            <a:off x="365760" y="457200"/>
-            <a:ext cx="7315200" cy="548640"/>
-          </a:xfrm>
-          <a:prstGeom prst="rect">
-            <a:avLst/>
-          </a:prstGeom>
-          <a:noFill/>
-        </p:spPr>
-        <p:txBody>
-          <a:bodyPr wrap="square">
-            <a:spAutoFit/>
-          </a:bodyPr>
-          <a:lstStyle/>
-          <a:p>
-            <a:pPr algn="l"/>
-            <a:r>
-              <a:rPr sz="2800" b="1" i="0">
-                <a:solidFill>
-                  <a:srgbClr val="FFFFFF"/>
-                </a:solidFill>
-              </a:rPr>
-              <a:t>What's Live &amp; Ready</a:t>
-            </a:r>
-          </a:p>
-        </p:txBody>
-      </p:sp>
-      <p:sp>
-        <p:nvSpPr>
-          <p:cNvPr id="7" name="Rectangle 6"/>
+          <p:cNvPr id="12" name="Rectangle 11"/>
           <p:cNvSpPr/>
           <p:nvPr/>
         </p:nvSpPr>
         <p:spPr>
           <a:xfrm>
-            <a:off x="320040" y="1325880"/>
-            <a:ext cx="3749039" cy="5212080"/>
-          </a:xfrm>
-          <a:prstGeom prst="rect">
-            <a:avLst/>
-          </a:prstGeom>
-          <a:solidFill>
-            <a:srgbClr val="F0F4FC"/>
-          </a:solidFill>
-          <a:ln w="12700">
-            <a:solidFill>
-              <a:srgbClr val="CCD9EE"/>
-            </a:solidFill>
-          </a:ln>
-        </p:spPr>
-        <p:style>
-          <a:lnRef idx="1">
-            <a:schemeClr val="accent1"/>
-          </a:lnRef>
-          <a:fillRef idx="3">
-            <a:schemeClr val="accent1"/>
-          </a:fillRef>
-          <a:effectRef idx="2">
-            <a:schemeClr val="accent1"/>
-          </a:effectRef>
-          <a:fontRef idx="minor">
-            <a:schemeClr val="lt1"/>
-          </a:fontRef>
-        </p:style>
-        <p:txBody>
-          <a:bodyPr rtlCol="0" anchor="ctr"/>
-          <a:lstStyle/>
-          <a:p>
-            <a:pPr algn="ctr"/>
-          </a:p>
-        </p:txBody>
-      </p:sp>
-      <p:sp>
-        <p:nvSpPr>
-          <p:cNvPr id="8" name="Rectangle 7"/>
-          <p:cNvSpPr/>
-          <p:nvPr/>
-        </p:nvSpPr>
-        <p:spPr>
-          <a:xfrm>
-            <a:off x="320040" y="1325880"/>
-            <a:ext cx="3749039" cy="640080"/>
+            <a:off x="4206240" y="1325880"/>
+            <a:ext cx="3822191" cy="566928"/>
           </a:xfrm>
           <a:prstGeom prst="rect">
             <a:avLst/>
@@ -3866,14 +4228,14 @@
       </p:sp>
       <p:sp>
         <p:nvSpPr>
-          <p:cNvPr id="9" name="TextBox 8"/>
+          <p:cNvPr id="13" name="TextBox 12"/>
           <p:cNvSpPr txBox="1"/>
           <p:nvPr/>
         </p:nvSpPr>
         <p:spPr>
           <a:xfrm>
-            <a:off x="411479" y="1371600"/>
-            <a:ext cx="3566160" cy="548640"/>
+            <a:off x="4315968" y="1371600"/>
+            <a:ext cx="3639311" cy="475488"/>
           </a:xfrm>
           <a:prstGeom prst="rect">
             <a:avLst/>
@@ -3888,26 +4250,27 @@
           <a:p>
             <a:pPr algn="l"/>
             <a:r>
-              <a:rPr sz="1400" b="1" i="0">
+              <a:rPr sz="1300" b="1" i="0">
                 <a:solidFill>
                   <a:srgbClr val="FFFFFF"/>
                 </a:solidFill>
+                <a:latin typeface="Calibri"/>
               </a:rPr>
-              <a:t>📄  10 Core Pages</a:t>
-            </a:r>
-          </a:p>
-        </p:txBody>
-      </p:sp>
-      <p:sp>
-        <p:nvSpPr>
-          <p:cNvPr id="10" name="TextBox 9"/>
+              <a:t>🎯  Key Features</a:t>
+            </a:r>
+          </a:p>
+        </p:txBody>
+      </p:sp>
+      <p:sp>
+        <p:nvSpPr>
+          <p:cNvPr id="14" name="TextBox 13"/>
           <p:cNvSpPr txBox="1"/>
           <p:nvPr/>
         </p:nvSpPr>
         <p:spPr>
           <a:xfrm>
-            <a:off x="457200" y="2011680"/>
-            <a:ext cx="3520440" cy="4297680"/>
+            <a:off x="4370831" y="1938528"/>
+            <a:ext cx="3547872" cy="4480560"/>
           </a:xfrm>
           <a:prstGeom prst="rect">
             <a:avLst/>
@@ -3922,145 +4285,185 @@
           <a:p>
             <a:pPr>
               <a:spcAft>
-                <a:spcPts val="600"/>
+                <a:spcPts val="500"/>
               </a:spcAft>
             </a:pPr>
             <a:r>
-              <a:rPr sz="1100">
-                <a:solidFill>
-                  <a:srgbClr val="444444"/>
-                </a:solidFill>
+              <a:rPr sz="1050">
+                <a:solidFill>
+                  <a:srgbClr val="1A1A4A"/>
+                </a:solidFill>
+                <a:latin typeface="Calibri"/>
               </a:rPr>
-              <a:t>•  Home — chapter intro &amp; mission</a:t>
+              <a:t>●  Mobile-responsive on all devices</a:t>
             </a:r>
           </a:p>
           <a:p>
             <a:pPr>
               <a:spcAft>
-                <a:spcPts val="600"/>
+                <a:spcPts val="500"/>
               </a:spcAft>
             </a:pPr>
             <a:r>
-              <a:rPr sz="1100">
-                <a:solidFill>
-                  <a:srgbClr val="444444"/>
-                </a:solidFill>
+              <a:rPr sz="1050">
+                <a:solidFill>
+                  <a:srgbClr val="1A1A4A"/>
+                </a:solidFill>
+                <a:latin typeface="Calibri"/>
               </a:rPr>
-              <a:t>•  About Us — chapter story</a:t>
+              <a:t>●  Official PBS Royal Blue &amp; White branding</a:t>
             </a:r>
           </a:p>
           <a:p>
             <a:pPr>
               <a:spcAft>
-                <a:spcPts val="600"/>
+                <a:spcPts val="500"/>
               </a:spcAft>
             </a:pPr>
             <a:r>
-              <a:rPr sz="1100">
-                <a:solidFill>
-                  <a:srgbClr val="444444"/>
-                </a:solidFill>
+              <a:rPr sz="1050">
+                <a:solidFill>
+                  <a:srgbClr val="1A1A4A"/>
+                </a:solidFill>
+                <a:latin typeface="Calibri"/>
               </a:rPr>
-              <a:t>•  President's Corner — message &amp; contact</a:t>
+              <a:t>●  Officer roster with role-based emails</a:t>
             </a:r>
           </a:p>
           <a:p>
             <a:pPr>
               <a:spcAft>
-                <a:spcPts val="600"/>
+                <a:spcPts val="500"/>
               </a:spcAft>
             </a:pPr>
             <a:r>
-              <a:rPr sz="1100">
-                <a:solidFill>
-                  <a:srgbClr val="444444"/>
-                </a:solidFill>
+              <a:rPr sz="1050">
+                <a:solidFill>
+                  <a:srgbClr val="1A1A4A"/>
+                </a:solidFill>
+                <a:latin typeface="Calibri"/>
               </a:rPr>
-              <a:t>•  Executive Board — full officer roster with emails</a:t>
+              <a:t>●  Live events calendar with RSVP/ticketing</a:t>
             </a:r>
           </a:p>
           <a:p>
             <a:pPr>
               <a:spcAft>
-                <a:spcPts val="600"/>
+                <a:spcPts val="500"/>
               </a:spcAft>
             </a:pPr>
             <a:r>
-              <a:rPr sz="1100">
-                <a:solidFill>
-                  <a:srgbClr val="444444"/>
-                </a:solidFill>
+              <a:rPr sz="1050">
+                <a:solidFill>
+                  <a:srgbClr val="1A1A4A"/>
+                </a:solidFill>
+                <a:latin typeface="Calibri"/>
               </a:rPr>
-              <a:t>•  Programs — chapter initiatives</a:t>
+              <a:t>●  MailPoet email newsletter integration</a:t>
             </a:r>
           </a:p>
           <a:p>
             <a:pPr>
               <a:spcAft>
-                <a:spcPts val="600"/>
+                <a:spcPts val="500"/>
               </a:spcAft>
             </a:pPr>
             <a:r>
-              <a:rPr sz="1100">
-                <a:solidFill>
-                  <a:srgbClr val="444444"/>
-                </a:solidFill>
+              <a:rPr sz="1050">
+                <a:solidFill>
+                  <a:srgbClr val="1A1A4A"/>
+                </a:solidFill>
+                <a:latin typeface="Calibri"/>
               </a:rPr>
-              <a:t>•  Events — upcoming activities</a:t>
+              <a:t>●  ProfilePress member login portal</a:t>
             </a:r>
           </a:p>
           <a:p>
             <a:pPr>
               <a:spcAft>
-                <a:spcPts val="600"/>
+                <a:spcPts val="500"/>
               </a:spcAft>
             </a:pPr>
             <a:r>
-              <a:rPr sz="1100">
-                <a:solidFill>
-                  <a:srgbClr val="444444"/>
-                </a:solidFill>
+              <a:rPr sz="1050">
+                <a:solidFill>
+                  <a:srgbClr val="1A1A4A"/>
+                </a:solidFill>
+                <a:latin typeface="Calibri"/>
               </a:rPr>
-              <a:t>•  News — announcements</a:t>
+              <a:t>●  WPForms contact &amp; registration forms</a:t>
             </a:r>
           </a:p>
           <a:p>
             <a:pPr>
               <a:spcAft>
-                <a:spcPts val="600"/>
+                <a:spcPts val="500"/>
               </a:spcAft>
             </a:pPr>
             <a:r>
-              <a:rPr sz="1100">
-                <a:solidFill>
-                  <a:srgbClr val="444444"/>
-                </a:solidFill>
+              <a:rPr sz="1050">
+                <a:solidFill>
+                  <a:srgbClr val="1A1A4A"/>
+                </a:solidFill>
+                <a:latin typeface="Calibri"/>
               </a:rPr>
-              <a:t>•  Members Portal — login area</a:t>
-            </a:r>
-          </a:p>
-        </p:txBody>
-      </p:sp>
-      <p:sp>
-        <p:nvSpPr>
-          <p:cNvPr id="11" name="Rectangle 10"/>
+              <a:t>●  Yoast SEO — optimized for Google</a:t>
+            </a:r>
+          </a:p>
+          <a:p>
+            <a:pPr>
+              <a:spcAft>
+                <a:spcPts val="500"/>
+              </a:spcAft>
+            </a:pPr>
+            <a:r>
+              <a:rPr sz="1050">
+                <a:solidFill>
+                  <a:srgbClr val="1A1A4A"/>
+                </a:solidFill>
+                <a:latin typeface="Calibri"/>
+              </a:rPr>
+              <a:t>●  Full-width modern Kadence theme layout</a:t>
+            </a:r>
+          </a:p>
+          <a:p>
+            <a:pPr>
+              <a:spcAft>
+                <a:spcPts val="500"/>
+              </a:spcAft>
+            </a:pPr>
+            <a:r>
+              <a:rPr sz="1050">
+                <a:solidFill>
+                  <a:srgbClr val="1A1A4A"/>
+                </a:solidFill>
+                <a:latin typeface="Calibri"/>
+              </a:rPr>
+              <a:t>●  2026 Golf Tournament landing page</a:t>
+            </a:r>
+          </a:p>
+        </p:txBody>
+      </p:sp>
+      <p:sp>
+        <p:nvSpPr>
+          <p:cNvPr id="15" name="Rectangle 14"/>
           <p:cNvSpPr/>
           <p:nvPr/>
         </p:nvSpPr>
         <p:spPr>
           <a:xfrm>
-            <a:off x="4251959" y="1325880"/>
-            <a:ext cx="3749039" cy="5212080"/>
+            <a:off x="8229600" y="1325880"/>
+            <a:ext cx="3822191" cy="5257800"/>
           </a:xfrm>
           <a:prstGeom prst="rect">
             <a:avLst/>
           </a:prstGeom>
           <a:solidFill>
-            <a:srgbClr val="F0F4FC"/>
+            <a:srgbClr val="E8EFF8"/>
           </a:solidFill>
-          <a:ln w="12700">
+          <a:ln w="6350">
             <a:solidFill>
-              <a:srgbClr val="CCD9EE"/>
+              <a:srgbClr val="BBCCEE"/>
             </a:solidFill>
           </a:ln>
         </p:spPr>
@@ -4088,14 +4491,14 @@
       </p:sp>
       <p:sp>
         <p:nvSpPr>
-          <p:cNvPr id="12" name="Rectangle 11"/>
+          <p:cNvPr id="16" name="Rectangle 15"/>
           <p:cNvSpPr/>
           <p:nvPr/>
         </p:nvSpPr>
         <p:spPr>
           <a:xfrm>
-            <a:off x="4251959" y="1325880"/>
-            <a:ext cx="3749039" cy="640080"/>
+            <a:off x="8229600" y="1325880"/>
+            <a:ext cx="3822191" cy="566928"/>
           </a:xfrm>
           <a:prstGeom prst="rect">
             <a:avLst/>
@@ -4131,14 +4534,14 @@
       </p:sp>
       <p:sp>
         <p:nvSpPr>
-          <p:cNvPr id="13" name="TextBox 12"/>
+          <p:cNvPr id="17" name="TextBox 16"/>
           <p:cNvSpPr txBox="1"/>
           <p:nvPr/>
         </p:nvSpPr>
         <p:spPr>
           <a:xfrm>
-            <a:off x="4343399" y="1371600"/>
-            <a:ext cx="3566160" cy="548640"/>
+            <a:off x="8339327" y="1371600"/>
+            <a:ext cx="3639311" cy="475488"/>
           </a:xfrm>
           <a:prstGeom prst="rect">
             <a:avLst/>
@@ -4153,26 +4556,27 @@
           <a:p>
             <a:pPr algn="l"/>
             <a:r>
-              <a:rPr sz="1400" b="1" i="0">
+              <a:rPr sz="1300" b="1" i="0">
                 <a:solidFill>
                   <a:srgbClr val="FFFFFF"/>
                 </a:solidFill>
+                <a:latin typeface="Calibri"/>
               </a:rPr>
-              <a:t>🎯  Key Features</a:t>
-            </a:r>
-          </a:p>
-        </p:txBody>
-      </p:sp>
-      <p:sp>
-        <p:nvSpPr>
-          <p:cNvPr id="14" name="TextBox 13"/>
+              <a:t>🔧  Plugins Installed</a:t>
+            </a:r>
+          </a:p>
+        </p:txBody>
+      </p:sp>
+      <p:sp>
+        <p:nvSpPr>
+          <p:cNvPr id="18" name="TextBox 17"/>
           <p:cNvSpPr txBox="1"/>
           <p:nvPr/>
         </p:nvSpPr>
         <p:spPr>
           <a:xfrm>
-            <a:off x="4389120" y="2011680"/>
-            <a:ext cx="3520440" cy="4297680"/>
+            <a:off x="8394192" y="1938528"/>
+            <a:ext cx="3547872" cy="4480560"/>
           </a:xfrm>
           <a:prstGeom prst="rect">
             <a:avLst/>
@@ -4187,180 +4591,127 @@
           <a:p>
             <a:pPr>
               <a:spcAft>
-                <a:spcPts val="600"/>
+                <a:spcPts val="500"/>
               </a:spcAft>
             </a:pPr>
             <a:r>
-              <a:rPr sz="1100">
-                <a:solidFill>
-                  <a:srgbClr val="444444"/>
-                </a:solidFill>
+              <a:rPr sz="1050">
+                <a:solidFill>
+                  <a:srgbClr val="1A1A4A"/>
+                </a:solidFill>
+                <a:latin typeface="Calibri"/>
               </a:rPr>
-              <a:t>•  Mobile-responsive on all devices</a:t>
+              <a:t>●  The Events Calendar — event management</a:t>
             </a:r>
           </a:p>
           <a:p>
             <a:pPr>
               <a:spcAft>
-                <a:spcPts val="600"/>
+                <a:spcPts val="500"/>
               </a:spcAft>
             </a:pPr>
             <a:r>
-              <a:rPr sz="1100">
-                <a:solidFill>
-                  <a:srgbClr val="444444"/>
-                </a:solidFill>
+              <a:rPr sz="1050">
+                <a:solidFill>
+                  <a:srgbClr val="1A1A4A"/>
+                </a:solidFill>
+                <a:latin typeface="Calibri"/>
               </a:rPr>
-              <a:t>•  Official PBS branding (Royal Blue &amp; Gold)</a:t>
+              <a:t>●  Event Tickets — online registration</a:t>
             </a:r>
           </a:p>
           <a:p>
             <a:pPr>
               <a:spcAft>
-                <a:spcPts val="600"/>
+                <a:spcPts val="500"/>
               </a:spcAft>
             </a:pPr>
             <a:r>
-              <a:rPr sz="1100">
-                <a:solidFill>
-                  <a:srgbClr val="444444"/>
-                </a:solidFill>
+              <a:rPr sz="1050">
+                <a:solidFill>
+                  <a:srgbClr val="1A1A4A"/>
+                </a:solidFill>
+                <a:latin typeface="Calibri"/>
               </a:rPr>
-              <a:t>•  Officer roster with role-based emails</a:t>
+              <a:t>●  Kadence Blocks — page builder</a:t>
             </a:r>
           </a:p>
           <a:p>
             <a:pPr>
               <a:spcAft>
-                <a:spcPts val="600"/>
+                <a:spcPts val="500"/>
               </a:spcAft>
             </a:pPr>
             <a:r>
-              <a:rPr sz="1100">
-                <a:solidFill>
-                  <a:srgbClr val="444444"/>
-                </a:solidFill>
+              <a:rPr sz="1050">
+                <a:solidFill>
+                  <a:srgbClr val="1A1A4A"/>
+                </a:solidFill>
+                <a:latin typeface="Calibri"/>
               </a:rPr>
-              <a:t>•  Events calendar (The Events Calendar plugin)</a:t>
+              <a:t>●  WPForms Lite — contact forms</a:t>
             </a:r>
           </a:p>
           <a:p>
             <a:pPr>
               <a:spcAft>
-                <a:spcPts val="600"/>
+                <a:spcPts val="500"/>
               </a:spcAft>
             </a:pPr>
             <a:r>
-              <a:rPr sz="1100">
-                <a:solidFill>
-                  <a:srgbClr val="444444"/>
-                </a:solidFill>
+              <a:rPr sz="1050">
+                <a:solidFill>
+                  <a:srgbClr val="1A1A4A"/>
+                </a:solidFill>
+                <a:latin typeface="Calibri"/>
               </a:rPr>
-              <a:t>•  MailPoet email newsletter integration</a:t>
+              <a:t>●  MailPoet — newsletters &amp; email</a:t>
             </a:r>
           </a:p>
           <a:p>
             <a:pPr>
               <a:spcAft>
-                <a:spcPts val="600"/>
+                <a:spcPts val="500"/>
               </a:spcAft>
             </a:pPr>
             <a:r>
-              <a:rPr sz="1100">
-                <a:solidFill>
-                  <a:srgbClr val="444444"/>
-                </a:solidFill>
+              <a:rPr sz="1050">
+                <a:solidFill>
+                  <a:srgbClr val="1A1A4A"/>
+                </a:solidFill>
+                <a:latin typeface="Calibri"/>
               </a:rPr>
-              <a:t>•  ProfilePress member login portal</a:t>
+              <a:t>●  ProfilePress — member login</a:t>
             </a:r>
           </a:p>
           <a:p>
             <a:pPr>
               <a:spcAft>
-                <a:spcPts val="600"/>
+                <a:spcPts val="500"/>
               </a:spcAft>
             </a:pPr>
             <a:r>
-              <a:rPr sz="1100">
-                <a:solidFill>
-                  <a:srgbClr val="444444"/>
-                </a:solidFill>
+              <a:rPr sz="1050">
+                <a:solidFill>
+                  <a:srgbClr val="1A1A4A"/>
+                </a:solidFill>
+                <a:latin typeface="Calibri"/>
               </a:rPr>
-              <a:t>•  Yoast SEO — Google-ready</a:t>
-            </a:r>
-          </a:p>
-          <a:p>
-            <a:pPr>
-              <a:spcAft>
-                <a:spcPts val="600"/>
-              </a:spcAft>
-            </a:pPr>
-            <a:r>
-              <a:rPr sz="1100">
-                <a:solidFill>
-                  <a:srgbClr val="444444"/>
-                </a:solidFill>
-              </a:rPr>
-              <a:t>•  WPForms contact &amp; registration forms</a:t>
-            </a:r>
-          </a:p>
-        </p:txBody>
-      </p:sp>
-      <p:sp>
-        <p:nvSpPr>
-          <p:cNvPr id="15" name="Rectangle 14"/>
+              <a:t>●  Yoast SEO — search optimization</a:t>
+            </a:r>
+          </a:p>
+        </p:txBody>
+      </p:sp>
+      <p:sp>
+        <p:nvSpPr>
+          <p:cNvPr id="19" name="Rectangle 18"/>
           <p:cNvSpPr/>
           <p:nvPr/>
         </p:nvSpPr>
         <p:spPr>
           <a:xfrm>
-            <a:off x="8183879" y="1325880"/>
-            <a:ext cx="3749039" cy="5212080"/>
-          </a:xfrm>
-          <a:prstGeom prst="rect">
-            <a:avLst/>
-          </a:prstGeom>
-          <a:solidFill>
-            <a:srgbClr val="F0F4FC"/>
-          </a:solidFill>
-          <a:ln w="12700">
-            <a:solidFill>
-              <a:srgbClr val="CCD9EE"/>
-            </a:solidFill>
-          </a:ln>
-        </p:spPr>
-        <p:style>
-          <a:lnRef idx="1">
-            <a:schemeClr val="accent1"/>
-          </a:lnRef>
-          <a:fillRef idx="3">
-            <a:schemeClr val="accent1"/>
-          </a:fillRef>
-          <a:effectRef idx="2">
-            <a:schemeClr val="accent1"/>
-          </a:effectRef>
-          <a:fontRef idx="minor">
-            <a:schemeClr val="lt1"/>
-          </a:fontRef>
-        </p:style>
-        <p:txBody>
-          <a:bodyPr rtlCol="0" anchor="ctr"/>
-          <a:lstStyle/>
-          <a:p>
-            <a:pPr algn="ctr"/>
-          </a:p>
-        </p:txBody>
-      </p:sp>
-      <p:sp>
-        <p:nvSpPr>
-          <p:cNvPr id="16" name="Rectangle 15"/>
-          <p:cNvSpPr/>
-          <p:nvPr/>
-        </p:nvSpPr>
-        <p:spPr>
-          <a:xfrm>
-            <a:off x="8183879" y="1325880"/>
-            <a:ext cx="3749039" cy="640080"/>
+            <a:off x="0" y="6601968"/>
+            <a:ext cx="12188952" cy="256032"/>
           </a:xfrm>
           <a:prstGeom prst="rect">
             <a:avLst/>
@@ -4396,14 +4747,14 @@
       </p:sp>
       <p:sp>
         <p:nvSpPr>
-          <p:cNvPr id="17" name="TextBox 16"/>
+          <p:cNvPr id="20" name="TextBox 19"/>
           <p:cNvSpPr txBox="1"/>
           <p:nvPr/>
         </p:nvSpPr>
         <p:spPr>
           <a:xfrm>
-            <a:off x="8275319" y="1371600"/>
-            <a:ext cx="3566160" cy="548640"/>
+            <a:off x="0" y="6620256"/>
+            <a:ext cx="12188952" cy="228600"/>
           </a:xfrm>
           <a:prstGeom prst="rect">
             <a:avLst/>
@@ -4416,219 +4767,15 @@
           </a:bodyPr>
           <a:lstStyle/>
           <a:p>
-            <a:pPr algn="l"/>
-            <a:r>
-              <a:rPr sz="1400" b="1" i="0">
+            <a:pPr algn="ctr"/>
+            <a:r>
+              <a:rPr sz="900" b="0" i="0">
                 <a:solidFill>
                   <a:srgbClr val="FFFFFF"/>
                 </a:solidFill>
+                <a:latin typeface="Calibri"/>
               </a:rPr>
-              <a:t>🔧  Plugins Installed</a:t>
-            </a:r>
-          </a:p>
-        </p:txBody>
-      </p:sp>
-      <p:sp>
-        <p:nvSpPr>
-          <p:cNvPr id="18" name="TextBox 17"/>
-          <p:cNvSpPr txBox="1"/>
-          <p:nvPr/>
-        </p:nvSpPr>
-        <p:spPr>
-          <a:xfrm>
-            <a:off x="8321040" y="2011680"/>
-            <a:ext cx="3520440" cy="4297680"/>
-          </a:xfrm>
-          <a:prstGeom prst="rect">
-            <a:avLst/>
-          </a:prstGeom>
-          <a:noFill/>
-        </p:spPr>
-        <p:txBody>
-          <a:bodyPr wrap="square">
-            <a:spAutoFit/>
-          </a:bodyPr>
-          <a:lstStyle/>
-          <a:p>
-            <a:pPr>
-              <a:spcAft>
-                <a:spcPts val="600"/>
-              </a:spcAft>
-            </a:pPr>
-            <a:r>
-              <a:rPr sz="1100">
-                <a:solidFill>
-                  <a:srgbClr val="444444"/>
-                </a:solidFill>
-              </a:rPr>
-              <a:t>•  The Events Calendar — event management</a:t>
-            </a:r>
-          </a:p>
-          <a:p>
-            <a:pPr>
-              <a:spcAft>
-                <a:spcPts val="600"/>
-              </a:spcAft>
-            </a:pPr>
-            <a:r>
-              <a:rPr sz="1100">
-                <a:solidFill>
-                  <a:srgbClr val="444444"/>
-                </a:solidFill>
-              </a:rPr>
-              <a:t>•  Kadence Blocks — page builder</a:t>
-            </a:r>
-          </a:p>
-          <a:p>
-            <a:pPr>
-              <a:spcAft>
-                <a:spcPts val="600"/>
-              </a:spcAft>
-            </a:pPr>
-            <a:r>
-              <a:rPr sz="1100">
-                <a:solidFill>
-                  <a:srgbClr val="444444"/>
-                </a:solidFill>
-              </a:rPr>
-              <a:t>•  WPForms Lite — contact forms</a:t>
-            </a:r>
-          </a:p>
-          <a:p>
-            <a:pPr>
-              <a:spcAft>
-                <a:spcPts val="600"/>
-              </a:spcAft>
-            </a:pPr>
-            <a:r>
-              <a:rPr sz="1100">
-                <a:solidFill>
-                  <a:srgbClr val="444444"/>
-                </a:solidFill>
-              </a:rPr>
-              <a:t>•  MailPoet — newsletters</a:t>
-            </a:r>
-          </a:p>
-          <a:p>
-            <a:pPr>
-              <a:spcAft>
-                <a:spcPts val="600"/>
-              </a:spcAft>
-            </a:pPr>
-            <a:r>
-              <a:rPr sz="1100">
-                <a:solidFill>
-                  <a:srgbClr val="444444"/>
-                </a:solidFill>
-              </a:rPr>
-              <a:t>•  ProfilePress — member login</a:t>
-            </a:r>
-          </a:p>
-          <a:p>
-            <a:pPr>
-              <a:spcAft>
-                <a:spcPts val="600"/>
-              </a:spcAft>
-            </a:pPr>
-            <a:r>
-              <a:rPr sz="1100">
-                <a:solidFill>
-                  <a:srgbClr val="444444"/>
-                </a:solidFill>
-              </a:rPr>
-              <a:t>•  Yoast SEO — search optimization</a:t>
-            </a:r>
-          </a:p>
-          <a:p>
-            <a:pPr>
-              <a:spcAft>
-                <a:spcPts val="600"/>
-              </a:spcAft>
-            </a:pPr>
-            <a:r>
-              <a:rPr sz="1100">
-                <a:solidFill>
-                  <a:srgbClr val="444444"/>
-                </a:solidFill>
-              </a:rPr>
-              <a:t>•  Kadence Starter Templates — design library</a:t>
-            </a:r>
-          </a:p>
-        </p:txBody>
-      </p:sp>
-      <p:sp>
-        <p:nvSpPr>
-          <p:cNvPr id="19" name="Rectangle 18"/>
-          <p:cNvSpPr/>
-          <p:nvPr/>
-        </p:nvSpPr>
-        <p:spPr>
-          <a:xfrm>
-            <a:off x="0" y="6720840"/>
-            <a:ext cx="12188952" cy="137160"/>
-          </a:xfrm>
-          <a:prstGeom prst="rect">
-            <a:avLst/>
-          </a:prstGeom>
-          <a:solidFill>
-            <a:srgbClr val="FFC72C"/>
-          </a:solidFill>
-          <a:ln>
-            <a:noFill/>
-          </a:ln>
-        </p:spPr>
-        <p:style>
-          <a:lnRef idx="1">
-            <a:schemeClr val="accent1"/>
-          </a:lnRef>
-          <a:fillRef idx="3">
-            <a:schemeClr val="accent1"/>
-          </a:fillRef>
-          <a:effectRef idx="2">
-            <a:schemeClr val="accent1"/>
-          </a:effectRef>
-          <a:fontRef idx="minor">
-            <a:schemeClr val="lt1"/>
-          </a:fontRef>
-        </p:style>
-        <p:txBody>
-          <a:bodyPr rtlCol="0" anchor="ctr"/>
-          <a:lstStyle/>
-          <a:p>
-            <a:pPr algn="ctr"/>
-          </a:p>
-        </p:txBody>
-      </p:sp>
-      <p:sp>
-        <p:nvSpPr>
-          <p:cNvPr id="20" name="TextBox 19"/>
-          <p:cNvSpPr txBox="1"/>
-          <p:nvPr/>
-        </p:nvSpPr>
-        <p:spPr>
-          <a:xfrm>
-            <a:off x="0" y="6528816"/>
-            <a:ext cx="12188952" cy="201168"/>
-          </a:xfrm>
-          <a:prstGeom prst="rect">
-            <a:avLst/>
-          </a:prstGeom>
-          <a:noFill/>
-        </p:spPr>
-        <p:txBody>
-          <a:bodyPr wrap="square">
-            <a:spAutoFit/>
-          </a:bodyPr>
-          <a:lstStyle/>
-          <a:p>
-            <a:pPr algn="ctr"/>
-            <a:r>
-              <a:rPr sz="1000" b="0" i="0">
-                <a:solidFill>
-                  <a:srgbClr val="164F90"/>
-                </a:solidFill>
-              </a:rPr>
-              <a:t>newsite.psibetasigma1914.org</a:t>
+              <a:t>newsite.psibetasigma1914.org  ·  Austin Sigmas Chapter  ·  Phi Beta Sigma Fraternity, Inc.</a:t>
             </a:r>
           </a:p>
         </p:txBody>
@@ -4647,7 +4794,7 @@
     <p:bg>
       <p:bgPr>
         <a:solidFill>
-          <a:srgbClr val="0F3765"/>
+          <a:srgbClr val="164F90"/>
         </a:solidFill>
         <a:effectLst/>
       </p:bgPr>
@@ -4668,7 +4815,7 @@
         <p:spPr>
           <a:xfrm>
             <a:off x="0" y="0"/>
-            <a:ext cx="12188952" cy="73152"/>
+            <a:ext cx="12188952" cy="91440"/>
           </a:xfrm>
           <a:prstGeom prst="rect">
             <a:avLst/>
@@ -4710,14 +4857,14 @@
         </p:nvSpPr>
         <p:spPr>
           <a:xfrm>
-            <a:off x="0" y="73152"/>
-            <a:ext cx="5943600" cy="6784848"/>
+            <a:off x="6858000" y="91440"/>
+            <a:ext cx="5330952" cy="6766560"/>
           </a:xfrm>
           <a:prstGeom prst="rect">
             <a:avLst/>
           </a:prstGeom>
           <a:solidFill>
-            <a:srgbClr val="164F90"/>
+            <a:srgbClr val="FFFFFF"/>
           </a:solidFill>
           <a:ln>
             <a:noFill/>
@@ -4745,16 +4892,40 @@
           </a:p>
         </p:txBody>
       </p:sp>
-      <p:sp>
-        <p:nvSpPr>
-          <p:cNvPr id="4" name="TextBox 3"/>
+      <p:pic>
+        <p:nvPicPr>
+          <p:cNvPr id="4" name="Picture 3" descr="pbs_logo.jpeg"/>
+          <p:cNvPicPr>
+            <a:picLocks noChangeAspect="1"/>
+          </p:cNvPicPr>
+          <p:nvPr/>
+        </p:nvPicPr>
+        <p:blipFill>
+          <a:blip r:embed="rId2"/>
+          <a:stretch>
+            <a:fillRect/>
+          </a:stretch>
+        </p:blipFill>
+        <p:spPr>
+          <a:xfrm>
+            <a:off x="320040" y="274320"/>
+            <a:ext cx="1188720" cy="1188720"/>
+          </a:xfrm>
+          <a:prstGeom prst="rect">
+            <a:avLst/>
+          </a:prstGeom>
+        </p:spPr>
+      </p:pic>
+      <p:sp>
+        <p:nvSpPr>
+          <p:cNvPr id="5" name="TextBox 4"/>
           <p:cNvSpPr txBox="1"/>
           <p:nvPr/>
         </p:nvSpPr>
         <p:spPr>
           <a:xfrm>
-            <a:off x="457200" y="914400"/>
-            <a:ext cx="5029200" cy="411480"/>
+            <a:off x="411480" y="1600200"/>
+            <a:ext cx="6035040" cy="347472"/>
           </a:xfrm>
           <a:prstGeom prst="rect">
             <a:avLst/>
@@ -4769,10 +4940,11 @@
           <a:p>
             <a:pPr algn="l"/>
             <a:r>
-              <a:rPr sz="1100" b="1" i="0">
+              <a:rPr sz="1000" b="1" i="0">
                 <a:solidFill>
                   <a:srgbClr val="FFC72C"/>
                 </a:solidFill>
+                <a:latin typeface="Calibri"/>
               </a:rPr>
               <a:t>WHAT'S NEXT</a:t>
             </a:r>
@@ -4781,14 +4953,14 @@
       </p:sp>
       <p:sp>
         <p:nvSpPr>
-          <p:cNvPr id="5" name="TextBox 4"/>
+          <p:cNvPr id="6" name="TextBox 5"/>
           <p:cNvSpPr txBox="1"/>
           <p:nvPr/>
         </p:nvSpPr>
         <p:spPr>
           <a:xfrm>
-            <a:off x="457200" y="1325880"/>
-            <a:ext cx="5303520" cy="822960"/>
+            <a:off x="411480" y="1920240"/>
+            <a:ext cx="6035040" cy="685800"/>
           </a:xfrm>
           <a:prstGeom prst="rect">
             <a:avLst/>
@@ -4803,10 +4975,11 @@
           <a:p>
             <a:pPr algn="l"/>
             <a:r>
-              <a:rPr sz="3200" b="1" i="0">
+              <a:rPr sz="3000" b="1" i="0">
                 <a:solidFill>
                   <a:srgbClr val="FFFFFF"/>
                 </a:solidFill>
+                <a:latin typeface="Calibri"/>
               </a:rPr>
               <a:t>Coming Soon</a:t>
             </a:r>
@@ -4815,14 +4988,14 @@
       </p:sp>
       <p:sp>
         <p:nvSpPr>
-          <p:cNvPr id="6" name="Rectangle 5"/>
+          <p:cNvPr id="7" name="Rectangle 6"/>
           <p:cNvSpPr/>
           <p:nvPr/>
         </p:nvSpPr>
         <p:spPr>
           <a:xfrm>
-            <a:off x="457200" y="2194560"/>
-            <a:ext cx="914400" cy="64008"/>
+            <a:off x="411480" y="2651760"/>
+            <a:ext cx="1097280" cy="64008"/>
           </a:xfrm>
           <a:prstGeom prst="rect">
             <a:avLst/>
@@ -4858,14 +5031,14 @@
       </p:sp>
       <p:sp>
         <p:nvSpPr>
-          <p:cNvPr id="7" name="TextBox 6"/>
+          <p:cNvPr id="8" name="TextBox 7"/>
           <p:cNvSpPr txBox="1"/>
           <p:nvPr/>
         </p:nvSpPr>
         <p:spPr>
           <a:xfrm>
-            <a:off x="457200" y="2377440"/>
-            <a:ext cx="5212080" cy="4114800"/>
+            <a:off x="411480" y="2788920"/>
+            <a:ext cx="6035040" cy="3840480"/>
           </a:xfrm>
           <a:prstGeom prst="rect">
             <a:avLst/>
@@ -4880,29 +5053,31 @@
           <a:p>
             <a:pPr>
               <a:spcAft>
-                <a:spcPts val="600"/>
+                <a:spcPts val="700"/>
               </a:spcAft>
             </a:pPr>
             <a:r>
-              <a:rPr sz="1300">
+              <a:rPr sz="1250">
                 <a:solidFill>
                   <a:srgbClr val="FFFFFF"/>
                 </a:solidFill>
+                <a:latin typeface="Calibri"/>
               </a:rPr>
-              <a:t>→  Event Tickets — online registration &amp; ticketing</a:t>
+              <a:t>→  Event Tickets — online ticketing &amp; paid registration</a:t>
             </a:r>
           </a:p>
           <a:p>
             <a:pPr>
               <a:spcAft>
-                <a:spcPts val="600"/>
+                <a:spcPts val="700"/>
               </a:spcAft>
             </a:pPr>
             <a:r>
-              <a:rPr sz="1300">
+              <a:rPr sz="1250">
                 <a:solidFill>
                   <a:srgbClr val="FFFFFF"/>
                 </a:solidFill>
+                <a:latin typeface="Calibri"/>
               </a:rPr>
               <a:t>→  Officer headshots on Executive Board page</a:t>
             </a:r>
@@ -4910,44 +5085,47 @@
           <a:p>
             <a:pPr>
               <a:spcAft>
-                <a:spcPts val="600"/>
+                <a:spcPts val="700"/>
               </a:spcAft>
             </a:pPr>
             <a:r>
-              <a:rPr sz="1300">
+              <a:rPr sz="1250">
                 <a:solidFill>
                   <a:srgbClr val="FFFFFF"/>
                 </a:solidFill>
+                <a:latin typeface="Calibri"/>
               </a:rPr>
-              <a:t>→  WPForms contact form integration (Contact &amp; Join)</a:t>
+              <a:t>→  WPForms contact form — Contact &amp; Join Sigma pages</a:t>
             </a:r>
           </a:p>
           <a:p>
             <a:pPr>
               <a:spcAft>
-                <a:spcPts val="600"/>
+                <a:spcPts val="700"/>
               </a:spcAft>
             </a:pPr>
             <a:r>
-              <a:rPr sz="1300">
+              <a:rPr sz="1250">
                 <a:solidFill>
                   <a:srgbClr val="FFFFFF"/>
                 </a:solidFill>
+                <a:latin typeface="Calibri"/>
               </a:rPr>
-              <a:t>→  Member portal full activation</a:t>
+              <a:t>→  Member portal full activation via ProfilePress</a:t>
             </a:r>
           </a:p>
           <a:p>
             <a:pPr>
               <a:spcAft>
-                <a:spcPts val="600"/>
+                <a:spcPts val="700"/>
               </a:spcAft>
             </a:pPr>
             <a:r>
-              <a:rPr sz="1300">
+              <a:rPr sz="1250">
                 <a:solidFill>
                   <a:srgbClr val="FFFFFF"/>
                 </a:solidFill>
+                <a:latin typeface="Calibri"/>
               </a:rPr>
               <a:t>→  2026 Golf Tournament — ticket sales open</a:t>
             </a:r>
@@ -4955,14 +5133,15 @@
           <a:p>
             <a:pPr>
               <a:spcAft>
-                <a:spcPts val="600"/>
+                <a:spcPts val="700"/>
               </a:spcAft>
             </a:pPr>
             <a:r>
-              <a:rPr sz="1300">
+              <a:rPr sz="1250">
                 <a:solidFill>
                   <a:srgbClr val="FFFFFF"/>
                 </a:solidFill>
+                <a:latin typeface="Calibri"/>
               </a:rPr>
               <a:t>→  Newsletter signup via MailPoet</a:t>
             </a:r>
@@ -4970,30 +5149,47 @@
           <a:p>
             <a:pPr>
               <a:spcAft>
-                <a:spcPts val="600"/>
+                <a:spcPts val="700"/>
               </a:spcAft>
             </a:pPr>
             <a:r>
-              <a:rPr sz="1300">
+              <a:rPr sz="1250">
                 <a:solidFill>
                   <a:srgbClr val="FFFFFF"/>
                 </a:solidFill>
+                <a:latin typeface="Calibri"/>
               </a:rPr>
               <a:t>→  Google Analytics tracking setup</a:t>
             </a:r>
           </a:p>
-        </p:txBody>
-      </p:sp>
-      <p:sp>
-        <p:nvSpPr>
-          <p:cNvPr id="8" name="TextBox 7"/>
+          <a:p>
+            <a:pPr>
+              <a:spcAft>
+                <a:spcPts val="700"/>
+              </a:spcAft>
+            </a:pPr>
+            <a:r>
+              <a:rPr sz="1250">
+                <a:solidFill>
+                  <a:srgbClr val="FFFFFF"/>
+                </a:solidFill>
+                <a:latin typeface="Calibri"/>
+              </a:rPr>
+              <a:t>→  Full site domain migration to psibetasigma1914.org</a:t>
+            </a:r>
+          </a:p>
+        </p:txBody>
+      </p:sp>
+      <p:sp>
+        <p:nvSpPr>
+          <p:cNvPr id="9" name="TextBox 8"/>
           <p:cNvSpPr txBox="1"/>
           <p:nvPr/>
         </p:nvSpPr>
         <p:spPr>
           <a:xfrm>
-            <a:off x="6400800" y="1371600"/>
-            <a:ext cx="5303520" cy="731520"/>
+            <a:off x="7132320" y="640080"/>
+            <a:ext cx="4846320" cy="594360"/>
           </a:xfrm>
           <a:prstGeom prst="rect">
             <a:avLst/>
@@ -5008,10 +5204,11 @@
           <a:p>
             <a:pPr algn="l"/>
             <a:r>
-              <a:rPr sz="3000" b="1" i="0">
-                <a:solidFill>
-                  <a:srgbClr val="FFFFFF"/>
-                </a:solidFill>
+              <a:rPr sz="2600" b="1" i="0">
+                <a:solidFill>
+                  <a:srgbClr val="164F90"/>
+                </a:solidFill>
+                <a:latin typeface="Calibri"/>
               </a:rPr>
               <a:t>Visit the Site</a:t>
             </a:r>
@@ -5020,14 +5217,14 @@
       </p:sp>
       <p:sp>
         <p:nvSpPr>
-          <p:cNvPr id="9" name="Rectangle 8"/>
+          <p:cNvPr id="10" name="Rectangle 9"/>
           <p:cNvSpPr/>
           <p:nvPr/>
         </p:nvSpPr>
         <p:spPr>
           <a:xfrm>
-            <a:off x="6400800" y="2148840"/>
-            <a:ext cx="914400" cy="64008"/>
+            <a:off x="7132320" y="1280160"/>
+            <a:ext cx="914400" cy="54864"/>
           </a:xfrm>
           <a:prstGeom prst="rect">
             <a:avLst/>
@@ -5063,14 +5260,14 @@
       </p:sp>
       <p:sp>
         <p:nvSpPr>
-          <p:cNvPr id="10" name="TextBox 9"/>
+          <p:cNvPr id="11" name="TextBox 10"/>
           <p:cNvSpPr txBox="1"/>
           <p:nvPr/>
         </p:nvSpPr>
         <p:spPr>
           <a:xfrm>
-            <a:off x="6400800" y="2331720"/>
-            <a:ext cx="5303520" cy="502920"/>
+            <a:off x="7132320" y="1417320"/>
+            <a:ext cx="4846320" cy="411480"/>
           </a:xfrm>
           <a:prstGeom prst="rect">
             <a:avLst/>
@@ -5085,10 +5282,11 @@
           <a:p>
             <a:pPr algn="l"/>
             <a:r>
-              <a:rPr sz="1600" b="1" i="0">
-                <a:solidFill>
-                  <a:srgbClr val="FFC72C"/>
-                </a:solidFill>
+              <a:rPr sz="1300" b="1" i="0">
+                <a:solidFill>
+                  <a:srgbClr val="164F90"/>
+                </a:solidFill>
+                <a:latin typeface="Calibri"/>
               </a:rPr>
               <a:t>newsite.psibetasigma1914.org</a:t>
             </a:r>
@@ -5097,14 +5295,14 @@
       </p:sp>
       <p:sp>
         <p:nvSpPr>
-          <p:cNvPr id="11" name="TextBox 10"/>
+          <p:cNvPr id="12" name="TextBox 11"/>
           <p:cNvSpPr txBox="1"/>
           <p:nvPr/>
         </p:nvSpPr>
         <p:spPr>
           <a:xfrm>
-            <a:off x="6400800" y="3017520"/>
-            <a:ext cx="5303520" cy="822960"/>
+            <a:off x="7132320" y="1920240"/>
+            <a:ext cx="4846320" cy="640080"/>
           </a:xfrm>
           <a:prstGeom prst="rect">
             <a:avLst/>
@@ -5119,10 +5317,11 @@
           <a:p>
             <a:pPr algn="l"/>
             <a:r>
-              <a:rPr sz="1400" b="0" i="0">
-                <a:solidFill>
-                  <a:srgbClr val="FFFFFF"/>
-                </a:solidFill>
+              <a:rPr sz="1200" b="0" i="0">
+                <a:solidFill>
+                  <a:srgbClr val="0F3765"/>
+                </a:solidFill>
+                <a:latin typeface="Calibri"/>
               </a:rPr>
               <a:t>Share with brothers, family,
 and the Austin community.</a:t>
@@ -5130,25 +5329,51 @@
           </a:p>
         </p:txBody>
       </p:sp>
-      <p:sp>
-        <p:nvSpPr>
-          <p:cNvPr id="12" name="Rectangle 11"/>
+      <p:pic>
+        <p:nvPicPr>
+          <p:cNvPr id="13" name="Picture 12" descr="pbs_logo.jpeg"/>
+          <p:cNvPicPr>
+            <a:picLocks noChangeAspect="1"/>
+          </p:cNvPicPr>
+          <p:nvPr/>
+        </p:nvPicPr>
+        <p:blipFill>
+          <a:blip r:embed="rId2"/>
+          <a:stretch>
+            <a:fillRect/>
+          </a:stretch>
+        </p:blipFill>
+        <p:spPr>
+          <a:xfrm>
+            <a:off x="7863840" y="2697480"/>
+            <a:ext cx="2560320" cy="2560320"/>
+          </a:xfrm>
+          <a:prstGeom prst="rect">
+            <a:avLst/>
+          </a:prstGeom>
+        </p:spPr>
+      </p:pic>
+      <p:sp>
+        <p:nvSpPr>
+          <p:cNvPr id="14" name="Rectangle 13"/>
           <p:cNvSpPr/>
           <p:nvPr/>
         </p:nvSpPr>
         <p:spPr>
           <a:xfrm>
-            <a:off x="6400800" y="4023360"/>
-            <a:ext cx="5120640" cy="1463040"/>
+            <a:off x="6995160" y="5486400"/>
+            <a:ext cx="4983480" cy="1078992"/>
           </a:xfrm>
           <a:prstGeom prst="rect">
             <a:avLst/>
           </a:prstGeom>
           <a:solidFill>
-            <a:srgbClr val="164F90"/>
+            <a:srgbClr val="E8EFF8"/>
           </a:solidFill>
-          <a:ln>
-            <a:noFill/>
+          <a:ln w="12700">
+            <a:solidFill>
+              <a:srgbClr val="164F90"/>
+            </a:solidFill>
           </a:ln>
         </p:spPr>
         <p:style>
@@ -5175,14 +5400,14 @@
       </p:sp>
       <p:sp>
         <p:nvSpPr>
-          <p:cNvPr id="13" name="TextBox 12"/>
+          <p:cNvPr id="15" name="TextBox 14"/>
           <p:cNvSpPr txBox="1"/>
           <p:nvPr/>
         </p:nvSpPr>
         <p:spPr>
           <a:xfrm>
-            <a:off x="6583680" y="4114800"/>
-            <a:ext cx="4754880" cy="411480"/>
+            <a:off x="7132320" y="5559552"/>
+            <a:ext cx="4663440" cy="320040"/>
           </a:xfrm>
           <a:prstGeom prst="rect">
             <a:avLst/>
@@ -5197,10 +5422,11 @@
           <a:p>
             <a:pPr algn="l"/>
             <a:r>
-              <a:rPr sz="1200" b="1" i="0">
-                <a:solidFill>
-                  <a:srgbClr val="FFC72C"/>
-                </a:solidFill>
+              <a:rPr sz="1100" b="1" i="0">
+                <a:solidFill>
+                  <a:srgbClr val="164F90"/>
+                </a:solidFill>
+                <a:latin typeface="Calibri"/>
               </a:rPr>
               <a:t>Questions or Content Updates?</a:t>
             </a:r>
@@ -5209,14 +5435,14 @@
       </p:sp>
       <p:sp>
         <p:nvSpPr>
-          <p:cNvPr id="14" name="TextBox 13"/>
+          <p:cNvPr id="16" name="TextBox 15"/>
           <p:cNvSpPr txBox="1"/>
           <p:nvPr/>
         </p:nvSpPr>
         <p:spPr>
           <a:xfrm>
-            <a:off x="6583680" y="4526280"/>
-            <a:ext cx="4754880" cy="914400"/>
+            <a:off x="7132320" y="5897880"/>
+            <a:ext cx="4663440" cy="594360"/>
           </a:xfrm>
           <a:prstGeom prst="rect">
             <a:avLst/>
@@ -5231,28 +5457,28 @@
           <a:p>
             <a:pPr algn="l"/>
             <a:r>
-              <a:rPr sz="1200" b="0" i="0">
-                <a:solidFill>
-                  <a:srgbClr val="FFFFFF"/>
-                </a:solidFill>
+              <a:rPr sz="1100" b="0" i="0">
+                <a:solidFill>
+                  <a:srgbClr val="0F3765"/>
+                </a:solidFill>
+                <a:latin typeface="Calibri"/>
               </a:rPr>
-              <a:t>📧 office@psibetasigma1914.org
-🌐 newsite.psibetasigma1914.org
-📍 Austin, TX</a:t>
-            </a:r>
-          </a:p>
-        </p:txBody>
-      </p:sp>
-      <p:sp>
-        <p:nvSpPr>
-          <p:cNvPr id="15" name="Rectangle 14"/>
+              <a:t>📧  office@psibetasigma1914.org
+🌐  newsite.psibetasigma1914.org</a:t>
+            </a:r>
+          </a:p>
+        </p:txBody>
+      </p:sp>
+      <p:sp>
+        <p:nvSpPr>
+          <p:cNvPr id="17" name="Rectangle 16"/>
           <p:cNvSpPr/>
           <p:nvPr/>
         </p:nvSpPr>
         <p:spPr>
           <a:xfrm>
-            <a:off x="0" y="6720840"/>
-            <a:ext cx="12188952" cy="137160"/>
+            <a:off x="0" y="6748272"/>
+            <a:ext cx="12188952" cy="109728"/>
           </a:xfrm>
           <a:prstGeom prst="rect">
             <a:avLst/>

--- a/pbs_site_launch.pptx
+++ b/pbs_site_launch.pptx
@@ -3156,7 +3156,7 @@
             <a:avLst/>
           </a:prstGeom>
           <a:solidFill>
-            <a:srgbClr val="FFC72C"/>
+            <a:srgbClr val="000000"/>
           </a:solidFill>
           <a:ln>
             <a:noFill/>
@@ -3242,7 +3242,7 @@
             <a:avLst/>
           </a:prstGeom>
           <a:solidFill>
-            <a:srgbClr val="FFC72C"/>
+            <a:srgbClr val="000000"/>
           </a:solidFill>
           <a:ln>
             <a:noFill/>
@@ -3345,8 +3345,8 @@
         </p:nvSpPr>
         <p:spPr>
           <a:xfrm>
-            <a:off x="7132320" y="4206240"/>
-            <a:ext cx="4937760" cy="457200"/>
+            <a:off x="7132320" y="4251960"/>
+            <a:ext cx="4937760" cy="411480"/>
           </a:xfrm>
           <a:prstGeom prst="rect">
             <a:avLst/>
@@ -3433,7 +3433,7 @@
             <a:r>
               <a:rPr sz="1100" b="1" i="0">
                 <a:solidFill>
-                  <a:srgbClr val="FFC72C"/>
+                  <a:srgbClr val="BBCCFF"/>
                 </a:solidFill>
                 <a:latin typeface="Calibri"/>
               </a:rPr>
@@ -3487,13 +3487,13 @@
         <p:spPr>
           <a:xfrm>
             <a:off x="502920" y="3291840"/>
-            <a:ext cx="1280160" cy="54864"/>
+            <a:ext cx="1280160" cy="45720"/>
           </a:xfrm>
           <a:prstGeom prst="rect">
             <a:avLst/>
           </a:prstGeom>
           <a:solidFill>
-            <a:srgbClr val="FFC72C"/>
+            <a:srgbClr val="000000"/>
           </a:solidFill>
           <a:ln>
             <a:noFill/>
@@ -3547,7 +3547,7 @@
             <a:r>
               <a:rPr sz="1700" b="1" i="0">
                 <a:solidFill>
-                  <a:srgbClr val="FFC72C"/>
+                  <a:srgbClr val="FFFFFF"/>
                 </a:solidFill>
                 <a:latin typeface="Calibri"/>
               </a:rPr>
@@ -3582,7 +3582,7 @@
             <a:r>
               <a:rPr sz="1100" b="0" i="1">
                 <a:solidFill>
-                  <a:srgbClr val="CCDDFF"/>
+                  <a:srgbClr val="BBCCFF"/>
                 </a:solidFill>
                 <a:latin typeface="Calibri"/>
               </a:rPr>
@@ -3704,13 +3704,13 @@
         <p:spPr>
           <a:xfrm>
             <a:off x="0" y="1143000"/>
-            <a:ext cx="12188952" cy="64008"/>
+            <a:ext cx="12188952" cy="54864"/>
           </a:xfrm>
           <a:prstGeom prst="rect">
             <a:avLst/>
           </a:prstGeom>
           <a:solidFill>
-            <a:srgbClr val="FFC72C"/>
+            <a:srgbClr val="000000"/>
           </a:solidFill>
           <a:ln>
             <a:noFill/>
@@ -3754,8 +3754,8 @@
         </p:blipFill>
         <p:spPr>
           <a:xfrm>
-            <a:off x="182880" y="45720"/>
-            <a:ext cx="1005840" cy="1005840"/>
+            <a:off x="182880" y="73152"/>
+            <a:ext cx="960120" cy="960120"/>
           </a:xfrm>
           <a:prstGeom prst="rect">
             <a:avLst/>
@@ -3788,7 +3788,7 @@
             <a:r>
               <a:rPr sz="1000" b="1" i="0">
                 <a:solidFill>
-                  <a:srgbClr val="FFC72C"/>
+                  <a:srgbClr val="BBCCFF"/>
                 </a:solidFill>
                 <a:latin typeface="Calibri"/>
               </a:rPr>
@@ -3840,8 +3840,8 @@
         </p:nvSpPr>
         <p:spPr>
           <a:xfrm>
-            <a:off x="201168" y="1325880"/>
-            <a:ext cx="3822191" cy="5257800"/>
+            <a:off x="201168" y="1316736"/>
+            <a:ext cx="3822191" cy="5266944"/>
           </a:xfrm>
           <a:prstGeom prst="rect">
             <a:avLst/>
@@ -3885,7 +3885,7 @@
         </p:nvSpPr>
         <p:spPr>
           <a:xfrm>
-            <a:off x="201168" y="1325880"/>
+            <a:off x="201168" y="1316736"/>
             <a:ext cx="3822191" cy="566928"/>
           </a:xfrm>
           <a:prstGeom prst="rect">
@@ -4146,8 +4146,8 @@
         </p:nvSpPr>
         <p:spPr>
           <a:xfrm>
-            <a:off x="4206240" y="1325880"/>
-            <a:ext cx="3822191" cy="5257800"/>
+            <a:off x="4206240" y="1316736"/>
+            <a:ext cx="3822191" cy="5266944"/>
           </a:xfrm>
           <a:prstGeom prst="rect">
             <a:avLst/>
@@ -4191,7 +4191,7 @@
         </p:nvSpPr>
         <p:spPr>
           <a:xfrm>
-            <a:off x="4206240" y="1325880"/>
+            <a:off x="4206240" y="1316736"/>
             <a:ext cx="3822191" cy="566928"/>
           </a:xfrm>
           <a:prstGeom prst="rect">
@@ -4452,8 +4452,8 @@
         </p:nvSpPr>
         <p:spPr>
           <a:xfrm>
-            <a:off x="8229600" y="1325880"/>
-            <a:ext cx="3822191" cy="5257800"/>
+            <a:off x="8229600" y="1316736"/>
+            <a:ext cx="3822191" cy="5266944"/>
           </a:xfrm>
           <a:prstGeom prst="rect">
             <a:avLst/>
@@ -4497,7 +4497,7 @@
         </p:nvSpPr>
         <p:spPr>
           <a:xfrm>
-            <a:off x="8229600" y="1325880"/>
+            <a:off x="8229600" y="1316736"/>
             <a:ext cx="3822191" cy="566928"/>
           </a:xfrm>
           <a:prstGeom prst="rect">
@@ -4717,7 +4717,7 @@
             <a:avLst/>
           </a:prstGeom>
           <a:solidFill>
-            <a:srgbClr val="164F90"/>
+            <a:srgbClr val="000000"/>
           </a:solidFill>
           <a:ln>
             <a:noFill/>
@@ -4821,7 +4821,7 @@
             <a:avLst/>
           </a:prstGeom>
           <a:solidFill>
-            <a:srgbClr val="FFC72C"/>
+            <a:srgbClr val="000000"/>
           </a:solidFill>
           <a:ln>
             <a:noFill/>
@@ -4942,7 +4942,7 @@
             <a:r>
               <a:rPr sz="1000" b="1" i="0">
                 <a:solidFill>
-                  <a:srgbClr val="FFC72C"/>
+                  <a:srgbClr val="BBCCFF"/>
                 </a:solidFill>
                 <a:latin typeface="Calibri"/>
               </a:rPr>
@@ -4995,13 +4995,13 @@
         <p:spPr>
           <a:xfrm>
             <a:off x="411480" y="2651760"/>
-            <a:ext cx="1097280" cy="64008"/>
+            <a:ext cx="1097280" cy="54864"/>
           </a:xfrm>
           <a:prstGeom prst="rect">
             <a:avLst/>
           </a:prstGeom>
           <a:solidFill>
-            <a:srgbClr val="FFC72C"/>
+            <a:srgbClr val="000000"/>
           </a:solidFill>
           <a:ln>
             <a:noFill/>
@@ -5053,7 +5053,7 @@
           <a:p>
             <a:pPr>
               <a:spcAft>
-                <a:spcPts val="700"/>
+                <a:spcPts val="500"/>
               </a:spcAft>
             </a:pPr>
             <a:r>
@@ -5069,7 +5069,7 @@
           <a:p>
             <a:pPr>
               <a:spcAft>
-                <a:spcPts val="700"/>
+                <a:spcPts val="500"/>
               </a:spcAft>
             </a:pPr>
             <a:r>
@@ -5085,7 +5085,7 @@
           <a:p>
             <a:pPr>
               <a:spcAft>
-                <a:spcPts val="700"/>
+                <a:spcPts val="500"/>
               </a:spcAft>
             </a:pPr>
             <a:r>
@@ -5101,7 +5101,7 @@
           <a:p>
             <a:pPr>
               <a:spcAft>
-                <a:spcPts val="700"/>
+                <a:spcPts val="500"/>
               </a:spcAft>
             </a:pPr>
             <a:r>
@@ -5117,7 +5117,7 @@
           <a:p>
             <a:pPr>
               <a:spcAft>
-                <a:spcPts val="700"/>
+                <a:spcPts val="500"/>
               </a:spcAft>
             </a:pPr>
             <a:r>
@@ -5133,7 +5133,7 @@
           <a:p>
             <a:pPr>
               <a:spcAft>
-                <a:spcPts val="700"/>
+                <a:spcPts val="500"/>
               </a:spcAft>
             </a:pPr>
             <a:r>
@@ -5149,7 +5149,7 @@
           <a:p>
             <a:pPr>
               <a:spcAft>
-                <a:spcPts val="700"/>
+                <a:spcPts val="500"/>
               </a:spcAft>
             </a:pPr>
             <a:r>
@@ -5165,7 +5165,7 @@
           <a:p>
             <a:pPr>
               <a:spcAft>
-                <a:spcPts val="700"/>
+                <a:spcPts val="500"/>
               </a:spcAft>
             </a:pPr>
             <a:r>
@@ -5223,14 +5223,14 @@
         </p:nvSpPr>
         <p:spPr>
           <a:xfrm>
-            <a:off x="7132320" y="1280160"/>
-            <a:ext cx="914400" cy="54864"/>
+            <a:off x="7132320" y="1298448"/>
+            <a:ext cx="914400" cy="45720"/>
           </a:xfrm>
           <a:prstGeom prst="rect">
             <a:avLst/>
           </a:prstGeom>
           <a:solidFill>
-            <a:srgbClr val="FFC72C"/>
+            <a:srgbClr val="000000"/>
           </a:solidFill>
           <a:ln>
             <a:noFill/>
@@ -5266,7 +5266,7 @@
         </p:nvSpPr>
         <p:spPr>
           <a:xfrm>
-            <a:off x="7132320" y="1417320"/>
+            <a:off x="7132320" y="1435608"/>
             <a:ext cx="4846320" cy="411480"/>
           </a:xfrm>
           <a:prstGeom prst="rect">
@@ -5372,7 +5372,7 @@
           </a:solidFill>
           <a:ln w="12700">
             <a:solidFill>
-              <a:srgbClr val="164F90"/>
+              <a:srgbClr val="000000"/>
             </a:solidFill>
           </a:ln>
         </p:spPr>
@@ -5484,7 +5484,7 @@
             <a:avLst/>
           </a:prstGeom>
           <a:solidFill>
-            <a:srgbClr val="FFC72C"/>
+            <a:srgbClr val="000000"/>
           </a:solidFill>
           <a:ln>
             <a:noFill/>
